--- a/Presentations/Biohack_Presentation.pptx
+++ b/Presentations/Biohack_Presentation.pptx
@@ -5,16 +5,15 @@
     <p:sldMasterId id="2147483648" r:id="rId1"/>
   </p:sldMasterIdLst>
   <p:notesMasterIdLst>
-    <p:notesMasterId r:id="rId9"/>
+    <p:notesMasterId r:id="rId8"/>
   </p:notesMasterIdLst>
   <p:sldIdLst>
     <p:sldId id="256" r:id="rId2"/>
-    <p:sldId id="264" r:id="rId3"/>
-    <p:sldId id="259" r:id="rId4"/>
-    <p:sldId id="260" r:id="rId5"/>
-    <p:sldId id="263" r:id="rId6"/>
-    <p:sldId id="261" r:id="rId7"/>
-    <p:sldId id="262" r:id="rId8"/>
+    <p:sldId id="259" r:id="rId3"/>
+    <p:sldId id="260" r:id="rId4"/>
+    <p:sldId id="263" r:id="rId5"/>
+    <p:sldId id="261" r:id="rId6"/>
+    <p:sldId id="262" r:id="rId7"/>
   </p:sldIdLst>
   <p:sldSz cx="12192000" cy="6858000"/>
   <p:notesSz cx="6858000" cy="9144000"/>
@@ -113,6 +112,11 @@
       </a:defRPr>
     </a:lvl9pPr>
   </p:defaultTextStyle>
+  <p:extLst>
+    <p:ext uri="{EFAFB233-063F-42B5-8137-9DF3F51BA10A}">
+      <p15:sldGuideLst xmlns:p15="http://schemas.microsoft.com/office/powerpoint/2012/main"/>
+    </p:ext>
+  </p:extLst>
 </p:presentation>
 </file>
 
@@ -464,93 +468,6 @@
     </a:lvl9pPr>
   </p:notesStyle>
 </p:notesMaster>
-</file>
-
-<file path=ppt/notesSlides/notesSlide1.xml><?xml version="1.0" encoding="utf-8"?>
-<p:notes xmlns:a="http://schemas.openxmlformats.org/drawingml/2006/main" xmlns:r="http://schemas.openxmlformats.org/officeDocument/2006/relationships" xmlns:p="http://schemas.openxmlformats.org/presentationml/2006/main">
-  <p:cSld>
-    <p:spTree>
-      <p:nvGrpSpPr>
-        <p:cNvPr id="1" name=""/>
-        <p:cNvGrpSpPr/>
-        <p:nvPr/>
-      </p:nvGrpSpPr>
-      <p:grpSpPr>
-        <a:xfrm>
-          <a:off x="0" y="0"/>
-          <a:ext cx="0" cy="0"/>
-          <a:chOff x="0" y="0"/>
-          <a:chExt cx="0" cy="0"/>
-        </a:xfrm>
-      </p:grpSpPr>
-      <p:sp>
-        <p:nvSpPr>
-          <p:cNvPr id="2" name="Slide Image Placeholder 1"/>
-          <p:cNvSpPr>
-            <a:spLocks noGrp="1" noRot="1" noChangeAspect="1"/>
-          </p:cNvSpPr>
-          <p:nvPr>
-            <p:ph type="sldImg"/>
-          </p:nvPr>
-        </p:nvSpPr>
-        <p:spPr/>
-      </p:sp>
-      <p:sp>
-        <p:nvSpPr>
-          <p:cNvPr id="3" name="Notes Placeholder 2"/>
-          <p:cNvSpPr>
-            <a:spLocks noGrp="1"/>
-          </p:cNvSpPr>
-          <p:nvPr>
-            <p:ph type="body" idx="1"/>
-          </p:nvPr>
-        </p:nvSpPr>
-        <p:spPr/>
-        <p:txBody>
-          <a:bodyPr/>
-          <a:lstStyle/>
-          <a:p>
-            <a:r>
-              <a:rPr lang="en-GB" dirty="0"/>
-              <a:t>Enzyme </a:t>
-            </a:r>
-          </a:p>
-        </p:txBody>
-      </p:sp>
-      <p:sp>
-        <p:nvSpPr>
-          <p:cNvPr id="4" name="Slide Number Placeholder 3"/>
-          <p:cNvSpPr>
-            <a:spLocks noGrp="1"/>
-          </p:cNvSpPr>
-          <p:nvPr>
-            <p:ph type="sldNum" sz="quarter" idx="5"/>
-          </p:nvPr>
-        </p:nvSpPr>
-        <p:spPr/>
-        <p:txBody>
-          <a:bodyPr/>
-          <a:lstStyle/>
-          <a:p>
-            <a:fld id="{E58D555A-2839-854B-83C7-511BB0DDFA80}" type="slidenum">
-              <a:rPr lang="en-GB" smtClean="0"/>
-              <a:t>2</a:t>
-            </a:fld>
-            <a:endParaRPr lang="en-GB"/>
-          </a:p>
-        </p:txBody>
-      </p:sp>
-    </p:spTree>
-    <p:extLst>
-      <p:ext uri="{BB962C8B-B14F-4D97-AF65-F5344CB8AC3E}">
-        <p14:creationId xmlns:p14="http://schemas.microsoft.com/office/powerpoint/2010/main" val="3735888039"/>
-      </p:ext>
-    </p:extLst>
-  </p:cSld>
-  <p:clrMapOvr>
-    <a:masterClrMapping/>
-  </p:clrMapOvr>
-</p:notes>
 </file>
 
 <file path=ppt/slideLayouts/slideLayout1.xml><?xml version="1.0" encoding="utf-8"?>
@@ -4171,7 +4088,7 @@
         <p:cNvPr id="1" name="">
           <a:extLst>
             <a:ext uri="{FF2B5EF4-FFF2-40B4-BE49-F238E27FC236}">
-              <a16:creationId xmlns:a16="http://schemas.microsoft.com/office/drawing/2014/main" id="{99FFE7C5-BA76-1D8A-D7F8-9C5ECFFDD808}"/>
+              <a16:creationId xmlns:a16="http://schemas.microsoft.com/office/drawing/2014/main" id="{87CD5F11-A768-5A10-42CE-0D7020380664}"/>
             </a:ext>
           </a:extLst>
         </p:cNvPr>
@@ -4186,79 +4103,12 @@
           <a:chExt cx="0" cy="0"/>
         </a:xfrm>
       </p:grpSpPr>
-      <p:sp>
-        <p:nvSpPr>
-          <p:cNvPr id="2" name="Title 1">
-            <a:extLst>
-              <a:ext uri="{FF2B5EF4-FFF2-40B4-BE49-F238E27FC236}">
-                <a16:creationId xmlns:a16="http://schemas.microsoft.com/office/drawing/2014/main" id="{1FB362DF-D423-6DF3-0728-062D229E7204}"/>
-              </a:ext>
-            </a:extLst>
-          </p:cNvPr>
-          <p:cNvSpPr>
-            <a:spLocks noGrp="1"/>
-          </p:cNvSpPr>
-          <p:nvPr>
-            <p:ph type="title"/>
-          </p:nvPr>
-        </p:nvSpPr>
-        <p:spPr/>
-        <p:txBody>
-          <a:bodyPr/>
-          <a:lstStyle/>
-          <a:p>
-            <a:r>
-              <a:rPr lang="en-GB" dirty="0">
-                <a:latin typeface="Arial" panose="020B0604020202020204" pitchFamily="34" charset="0"/>
-                <a:cs typeface="Arial" panose="020B0604020202020204" pitchFamily="34" charset="0"/>
-              </a:rPr>
-              <a:t>Problem</a:t>
-            </a:r>
-          </a:p>
-        </p:txBody>
-      </p:sp>
-      <p:sp>
-        <p:nvSpPr>
-          <p:cNvPr id="5" name="Content Placeholder 4">
-            <a:extLst>
-              <a:ext uri="{FF2B5EF4-FFF2-40B4-BE49-F238E27FC236}">
-                <a16:creationId xmlns:a16="http://schemas.microsoft.com/office/drawing/2014/main" id="{03AF5C3A-56C4-17AF-10B8-3BD0FDDE39C1}"/>
-              </a:ext>
-            </a:extLst>
-          </p:cNvPr>
-          <p:cNvSpPr>
-            <a:spLocks noGrp="1"/>
-          </p:cNvSpPr>
-          <p:nvPr>
-            <p:ph idx="1"/>
-          </p:nvPr>
-        </p:nvSpPr>
-        <p:spPr/>
-        <p:txBody>
-          <a:bodyPr>
-            <a:normAutofit/>
-          </a:bodyPr>
-          <a:lstStyle/>
-          <a:p>
-            <a:r>
-              <a:rPr lang="en-GB" dirty="0">
-                <a:latin typeface="Arial" panose="020B0604020202020204" pitchFamily="34" charset="0"/>
-                <a:cs typeface="Arial" panose="020B0604020202020204" pitchFamily="34" charset="0"/>
-              </a:rPr>
-              <a:t>Need to track intracellular structures</a:t>
-            </a:r>
-          </a:p>
-          <a:p>
-            <a:endParaRPr lang="en-GB" dirty="0"/>
-          </a:p>
-        </p:txBody>
-      </p:sp>
       <p:pic>
         <p:nvPicPr>
-          <p:cNvPr id="3" name="Graphic 2">
-            <a:extLst>
-              <a:ext uri="{FF2B5EF4-FFF2-40B4-BE49-F238E27FC236}">
-                <a16:creationId xmlns:a16="http://schemas.microsoft.com/office/drawing/2014/main" id="{06C9BF46-E198-35B7-073E-0120B45CAA92}"/>
+          <p:cNvPr id="6" name="Graphic 5">
+            <a:extLst>
+              <a:ext uri="{FF2B5EF4-FFF2-40B4-BE49-F238E27FC236}">
+                <a16:creationId xmlns:a16="http://schemas.microsoft.com/office/drawing/2014/main" id="{32CD6354-78BD-8BF3-3E51-9E2ED6516F2B}"/>
               </a:ext>
             </a:extLst>
           </p:cNvPr>
@@ -4268,10 +4118,167 @@
           <p:nvPr/>
         </p:nvPicPr>
         <p:blipFill>
-          <a:blip r:embed="rId3">
+          <a:blip r:embed="rId2">
             <a:extLst>
               <a:ext uri="{96DAC541-7B7A-43D3-8B79-37D633B846F1}">
-                <asvg:svgBlip xmlns:asvg="http://schemas.microsoft.com/office/drawing/2016/SVG/main" r:embed="rId4"/>
+                <asvg:svgBlip xmlns:asvg="http://schemas.microsoft.com/office/drawing/2016/SVG/main" r:embed="rId3"/>
+              </a:ext>
+            </a:extLst>
+          </a:blip>
+          <a:stretch>
+            <a:fillRect/>
+          </a:stretch>
+        </p:blipFill>
+        <p:spPr>
+          <a:xfrm>
+            <a:off x="9818842" y="2689061"/>
+            <a:ext cx="1821396" cy="3122393"/>
+          </a:xfrm>
+          <a:prstGeom prst="rect">
+            <a:avLst/>
+          </a:prstGeom>
+        </p:spPr>
+      </p:pic>
+      <p:sp>
+        <p:nvSpPr>
+          <p:cNvPr id="2" name="Title 1">
+            <a:extLst>
+              <a:ext uri="{FF2B5EF4-FFF2-40B4-BE49-F238E27FC236}">
+                <a16:creationId xmlns:a16="http://schemas.microsoft.com/office/drawing/2014/main" id="{2AE88FB6-6C3D-7521-FB53-FCF5BCBC6AAF}"/>
+              </a:ext>
+            </a:extLst>
+          </p:cNvPr>
+          <p:cNvSpPr>
+            <a:spLocks noGrp="1"/>
+          </p:cNvSpPr>
+          <p:nvPr>
+            <p:ph type="title"/>
+          </p:nvPr>
+        </p:nvSpPr>
+        <p:spPr/>
+        <p:txBody>
+          <a:bodyPr/>
+          <a:lstStyle/>
+          <a:p>
+            <a:r>
+              <a:rPr lang="en-GB" dirty="0">
+                <a:latin typeface="Arial" panose="020B0604020202020204" pitchFamily="34" charset="0"/>
+                <a:cs typeface="Arial" panose="020B0604020202020204" pitchFamily="34" charset="0"/>
+              </a:rPr>
+              <a:t>Problem</a:t>
+            </a:r>
+          </a:p>
+        </p:txBody>
+      </p:sp>
+      <p:sp>
+        <p:nvSpPr>
+          <p:cNvPr id="5" name="Content Placeholder 4">
+            <a:extLst>
+              <a:ext uri="{FF2B5EF4-FFF2-40B4-BE49-F238E27FC236}">
+                <a16:creationId xmlns:a16="http://schemas.microsoft.com/office/drawing/2014/main" id="{1D1836D0-989F-5662-DE46-B0ACFDE2BFA7}"/>
+              </a:ext>
+            </a:extLst>
+          </p:cNvPr>
+          <p:cNvSpPr>
+            <a:spLocks noGrp="1"/>
+          </p:cNvSpPr>
+          <p:nvPr>
+            <p:ph idx="1"/>
+          </p:nvPr>
+        </p:nvSpPr>
+        <p:spPr>
+          <a:xfrm>
+            <a:off x="838200" y="1825625"/>
+            <a:ext cx="7975294" cy="4351338"/>
+          </a:xfrm>
+        </p:spPr>
+        <p:txBody>
+          <a:bodyPr>
+            <a:normAutofit/>
+          </a:bodyPr>
+          <a:lstStyle/>
+          <a:p>
+            <a:r>
+              <a:rPr lang="en-GB" dirty="0">
+                <a:latin typeface="Arial" panose="020B0604020202020204" pitchFamily="34" charset="0"/>
+                <a:cs typeface="Arial" panose="020B0604020202020204" pitchFamily="34" charset="0"/>
+              </a:rPr>
+              <a:t>Need to track intracellular structures</a:t>
+            </a:r>
+          </a:p>
+          <a:p>
+            <a:r>
+              <a:rPr lang="en-GB" dirty="0">
+                <a:latin typeface="Arial" panose="020B0604020202020204" pitchFamily="34" charset="0"/>
+                <a:cs typeface="Arial" panose="020B0604020202020204" pitchFamily="34" charset="0"/>
+              </a:rPr>
+              <a:t>Tracking protein aggregates is relevant to:</a:t>
+            </a:r>
+          </a:p>
+          <a:p>
+            <a:pPr lvl="1"/>
+            <a:r>
+              <a:rPr lang="en-GB" sz="2800" dirty="0">
+                <a:latin typeface="Arial" panose="020B0604020202020204" pitchFamily="34" charset="0"/>
+                <a:cs typeface="Arial" panose="020B0604020202020204" pitchFamily="34" charset="0"/>
+              </a:rPr>
+              <a:t>Understanding how eukaryotic cells survive stress and starvation (for bioproduction and biomedicine)</a:t>
+            </a:r>
+          </a:p>
+          <a:p>
+            <a:pPr lvl="1"/>
+            <a:r>
+              <a:rPr lang="en-GB" sz="2800" dirty="0">
+                <a:latin typeface="Arial" panose="020B0604020202020204" pitchFamily="34" charset="0"/>
+                <a:cs typeface="Arial" panose="020B0604020202020204" pitchFamily="34" charset="0"/>
+              </a:rPr>
+              <a:t>Neurodegenerative diseases</a:t>
+            </a:r>
+          </a:p>
+          <a:p>
+            <a:pPr lvl="1"/>
+            <a:r>
+              <a:rPr lang="en-GB" sz="2800" dirty="0">
+                <a:latin typeface="Arial" panose="020B0604020202020204" pitchFamily="34" charset="0"/>
+                <a:cs typeface="Arial" panose="020B0604020202020204" pitchFamily="34" charset="0"/>
+              </a:rPr>
+              <a:t>Cell motility (cancer, immunology)</a:t>
+            </a:r>
+          </a:p>
+          <a:p>
+            <a:pPr lvl="1"/>
+            <a:r>
+              <a:rPr lang="en-GB" sz="2800" dirty="0">
+                <a:latin typeface="Arial" panose="020B0604020202020204" pitchFamily="34" charset="0"/>
+                <a:cs typeface="Arial" panose="020B0604020202020204" pitchFamily="34" charset="0"/>
+              </a:rPr>
+              <a:t>Structural integrity (diseases of the vasculature)</a:t>
+            </a:r>
+          </a:p>
+          <a:p>
+            <a:endParaRPr lang="en-GB" dirty="0"/>
+          </a:p>
+        </p:txBody>
+      </p:sp>
+      <p:pic>
+        <p:nvPicPr>
+          <p:cNvPr id="3" name="Graphic 2">
+            <a:extLst>
+              <a:ext uri="{FF2B5EF4-FFF2-40B4-BE49-F238E27FC236}">
+                <a16:creationId xmlns:a16="http://schemas.microsoft.com/office/drawing/2014/main" id="{320577D4-B5F7-1AEF-4099-B5F16B386EDA}"/>
+              </a:ext>
+            </a:extLst>
+          </p:cNvPr>
+          <p:cNvPicPr>
+            <a:picLocks noChangeAspect="1"/>
+          </p:cNvPicPr>
+          <p:nvPr/>
+        </p:nvPicPr>
+        <p:blipFill>
+          <a:blip r:embed="rId4">
+            <a:extLst>
+              <a:ext uri="{96DAC541-7B7A-43D3-8B79-37D633B846F1}">
+                <asvg:svgBlip xmlns:asvg="http://schemas.microsoft.com/office/drawing/2016/SVG/main" r:embed="rId5"/>
               </a:ext>
             </a:extLst>
           </a:blip>
@@ -4281,7 +4288,7 @@
         </p:blipFill>
         <p:spPr>
           <a:xfrm rot="19711490">
-            <a:off x="2308421" y="3125933"/>
+            <a:off x="8301822" y="800567"/>
             <a:ext cx="3697428" cy="1780243"/>
           </a:xfrm>
           <a:prstGeom prst="rect">
@@ -4294,7 +4301,7 @@
           <p:cNvPr id="4" name="Can 3">
             <a:extLst>
               <a:ext uri="{FF2B5EF4-FFF2-40B4-BE49-F238E27FC236}">
-                <a16:creationId xmlns:a16="http://schemas.microsoft.com/office/drawing/2014/main" id="{4E8A1639-E644-A0CD-C316-58DA327DC123}"/>
+                <a16:creationId xmlns:a16="http://schemas.microsoft.com/office/drawing/2014/main" id="{F96FCEA3-9491-718D-84F2-50EB477AB171}"/>
               </a:ext>
             </a:extLst>
           </p:cNvPr>
@@ -4303,7 +4310,7 @@
         </p:nvSpPr>
         <p:spPr>
           <a:xfrm rot="2900441">
-            <a:off x="3630185" y="3619280"/>
+            <a:off x="9623586" y="1293914"/>
             <a:ext cx="222530" cy="1238772"/>
           </a:xfrm>
           <a:prstGeom prst="can">
@@ -4345,7 +4352,7 @@
           <p:cNvPr id="7" name="TextBox 6">
             <a:extLst>
               <a:ext uri="{FF2B5EF4-FFF2-40B4-BE49-F238E27FC236}">
-                <a16:creationId xmlns:a16="http://schemas.microsoft.com/office/drawing/2014/main" id="{37C46198-3A34-E75B-256D-4AB473653ABC}"/>
+                <a16:creationId xmlns:a16="http://schemas.microsoft.com/office/drawing/2014/main" id="{8157A912-CDC8-4411-3876-B0B31C552FB6}"/>
               </a:ext>
             </a:extLst>
           </p:cNvPr>
@@ -4417,183 +4424,6 @@
               </a:rPr>
               <a:t>/licenses/by/3.0/</a:t>
             </a:r>
-          </a:p>
-        </p:txBody>
-      </p:sp>
-      <p:pic>
-        <p:nvPicPr>
-          <p:cNvPr id="9" name="Graphic 8">
-            <a:extLst>
-              <a:ext uri="{FF2B5EF4-FFF2-40B4-BE49-F238E27FC236}">
-                <a16:creationId xmlns:a16="http://schemas.microsoft.com/office/drawing/2014/main" id="{AF6C86F4-FD46-3FD2-DE27-EE49FC06BEA0}"/>
-              </a:ext>
-            </a:extLst>
-          </p:cNvPr>
-          <p:cNvPicPr>
-            <a:picLocks noChangeAspect="1"/>
-          </p:cNvPicPr>
-          <p:nvPr/>
-        </p:nvPicPr>
-        <p:blipFill>
-          <a:blip r:embed="rId5">
-            <a:extLst>
-              <a:ext uri="{96DAC541-7B7A-43D3-8B79-37D633B846F1}">
-                <asvg:svgBlip xmlns:asvg="http://schemas.microsoft.com/office/drawing/2016/SVG/main" r:embed="rId6"/>
-              </a:ext>
-            </a:extLst>
-          </a:blip>
-          <a:stretch>
-            <a:fillRect/>
-          </a:stretch>
-        </p:blipFill>
-        <p:spPr>
-          <a:xfrm>
-            <a:off x="7476070" y="2394377"/>
-            <a:ext cx="1821396" cy="3122393"/>
-          </a:xfrm>
-          <a:prstGeom prst="rect">
-            <a:avLst/>
-          </a:prstGeom>
-        </p:spPr>
-      </p:pic>
-    </p:spTree>
-    <p:extLst>
-      <p:ext uri="{BB962C8B-B14F-4D97-AF65-F5344CB8AC3E}">
-        <p14:creationId xmlns:p14="http://schemas.microsoft.com/office/powerpoint/2010/main" val="2153299133"/>
-      </p:ext>
-    </p:extLst>
-  </p:cSld>
-  <p:clrMapOvr>
-    <a:masterClrMapping/>
-  </p:clrMapOvr>
-</p:sld>
-</file>
-
-<file path=ppt/slides/slide3.xml><?xml version="1.0" encoding="utf-8"?>
-<p:sld xmlns:a="http://schemas.openxmlformats.org/drawingml/2006/main" xmlns:r="http://schemas.openxmlformats.org/officeDocument/2006/relationships" xmlns:p="http://schemas.openxmlformats.org/presentationml/2006/main">
-  <p:cSld>
-    <p:spTree>
-      <p:nvGrpSpPr>
-        <p:cNvPr id="1" name="">
-          <a:extLst>
-            <a:ext uri="{FF2B5EF4-FFF2-40B4-BE49-F238E27FC236}">
-              <a16:creationId xmlns:a16="http://schemas.microsoft.com/office/drawing/2014/main" id="{87CD5F11-A768-5A10-42CE-0D7020380664}"/>
-            </a:ext>
-          </a:extLst>
-        </p:cNvPr>
-        <p:cNvGrpSpPr/>
-        <p:nvPr/>
-      </p:nvGrpSpPr>
-      <p:grpSpPr>
-        <a:xfrm>
-          <a:off x="0" y="0"/>
-          <a:ext cx="0" cy="0"/>
-          <a:chOff x="0" y="0"/>
-          <a:chExt cx="0" cy="0"/>
-        </a:xfrm>
-      </p:grpSpPr>
-      <p:sp>
-        <p:nvSpPr>
-          <p:cNvPr id="2" name="Title 1">
-            <a:extLst>
-              <a:ext uri="{FF2B5EF4-FFF2-40B4-BE49-F238E27FC236}">
-                <a16:creationId xmlns:a16="http://schemas.microsoft.com/office/drawing/2014/main" id="{2AE88FB6-6C3D-7521-FB53-FCF5BCBC6AAF}"/>
-              </a:ext>
-            </a:extLst>
-          </p:cNvPr>
-          <p:cNvSpPr>
-            <a:spLocks noGrp="1"/>
-          </p:cNvSpPr>
-          <p:nvPr>
-            <p:ph type="title"/>
-          </p:nvPr>
-        </p:nvSpPr>
-        <p:spPr/>
-        <p:txBody>
-          <a:bodyPr/>
-          <a:lstStyle/>
-          <a:p>
-            <a:r>
-              <a:rPr lang="en-GB" dirty="0">
-                <a:latin typeface="Arial" panose="020B0604020202020204" pitchFamily="34" charset="0"/>
-                <a:cs typeface="Arial" panose="020B0604020202020204" pitchFamily="34" charset="0"/>
-              </a:rPr>
-              <a:t>Problem</a:t>
-            </a:r>
-          </a:p>
-        </p:txBody>
-      </p:sp>
-      <p:sp>
-        <p:nvSpPr>
-          <p:cNvPr id="5" name="Content Placeholder 4">
-            <a:extLst>
-              <a:ext uri="{FF2B5EF4-FFF2-40B4-BE49-F238E27FC236}">
-                <a16:creationId xmlns:a16="http://schemas.microsoft.com/office/drawing/2014/main" id="{1D1836D0-989F-5662-DE46-B0ACFDE2BFA7}"/>
-              </a:ext>
-            </a:extLst>
-          </p:cNvPr>
-          <p:cNvSpPr>
-            <a:spLocks noGrp="1"/>
-          </p:cNvSpPr>
-          <p:nvPr>
-            <p:ph idx="1"/>
-          </p:nvPr>
-        </p:nvSpPr>
-        <p:spPr/>
-        <p:txBody>
-          <a:bodyPr>
-            <a:normAutofit/>
-          </a:bodyPr>
-          <a:lstStyle/>
-          <a:p>
-            <a:r>
-              <a:rPr lang="en-GB" dirty="0">
-                <a:latin typeface="Arial" panose="020B0604020202020204" pitchFamily="34" charset="0"/>
-                <a:cs typeface="Arial" panose="020B0604020202020204" pitchFamily="34" charset="0"/>
-              </a:rPr>
-              <a:t>Need to track intracellular structures</a:t>
-            </a:r>
-          </a:p>
-          <a:p>
-            <a:r>
-              <a:rPr lang="en-GB" dirty="0">
-                <a:latin typeface="Arial" panose="020B0604020202020204" pitchFamily="34" charset="0"/>
-                <a:cs typeface="Arial" panose="020B0604020202020204" pitchFamily="34" charset="0"/>
-              </a:rPr>
-              <a:t>Tracking protein aggregates</a:t>
-            </a:r>
-          </a:p>
-          <a:p>
-            <a:pPr lvl="1"/>
-            <a:r>
-              <a:rPr lang="en-GB" sz="2800" dirty="0">
-                <a:latin typeface="Arial" panose="020B0604020202020204" pitchFamily="34" charset="0"/>
-                <a:cs typeface="Arial" panose="020B0604020202020204" pitchFamily="34" charset="0"/>
-              </a:rPr>
-              <a:t>Relevant to understanding how eukaryotic cells survive stress and starvation (for bioproduction and biomedicine)</a:t>
-            </a:r>
-          </a:p>
-          <a:p>
-            <a:pPr lvl="1"/>
-            <a:r>
-              <a:rPr lang="en-GB" sz="2800" dirty="0">
-                <a:latin typeface="Arial" panose="020B0604020202020204" pitchFamily="34" charset="0"/>
-                <a:cs typeface="Arial" panose="020B0604020202020204" pitchFamily="34" charset="0"/>
-              </a:rPr>
-              <a:t>Possible relevance to neurodegenerative diseases</a:t>
-            </a:r>
-          </a:p>
-          <a:p>
-            <a:r>
-              <a:rPr lang="en-GB" dirty="0">
-                <a:latin typeface="Arial" panose="020B0604020202020204" pitchFamily="34" charset="0"/>
-                <a:cs typeface="Arial" panose="020B0604020202020204" pitchFamily="34" charset="0"/>
-              </a:rPr>
-              <a:t>Tracking linear intracellular structures/polymers is relevant to wide range of other biological problems such as mechanical stress and cell mobility</a:t>
-            </a:r>
-          </a:p>
-          <a:p>
-            <a:endParaRPr lang="en-GB" dirty="0"/>
           </a:p>
         </p:txBody>
       </p:sp>
@@ -4610,7 +4440,7 @@
 </p:sld>
 </file>
 
-<file path=ppt/slides/slide4.xml><?xml version="1.0" encoding="utf-8"?>
+<file path=ppt/slides/slide3.xml><?xml version="1.0" encoding="utf-8"?>
 <p:sld xmlns:a="http://schemas.openxmlformats.org/drawingml/2006/main" xmlns:r="http://schemas.openxmlformats.org/officeDocument/2006/relationships" xmlns:p="http://schemas.openxmlformats.org/presentationml/2006/main">
   <p:cSld>
     <p:spTree>
@@ -4680,7 +4510,12 @@
             <p:ph idx="1"/>
           </p:nvPr>
         </p:nvSpPr>
-        <p:spPr/>
+        <p:spPr>
+          <a:xfrm>
+            <a:off x="838200" y="1825625"/>
+            <a:ext cx="6807506" cy="4351338"/>
+          </a:xfrm>
+        </p:spPr>
         <p:txBody>
           <a:bodyPr/>
           <a:lstStyle/>
@@ -4750,7 +4585,7 @@
 </p:sld>
 </file>
 
-<file path=ppt/slides/slide5.xml><?xml version="1.0" encoding="utf-8"?>
+<file path=ppt/slides/slide4.xml><?xml version="1.0" encoding="utf-8"?>
 <p:sld xmlns:a="http://schemas.openxmlformats.org/drawingml/2006/main" xmlns:r="http://schemas.openxmlformats.org/officeDocument/2006/relationships" xmlns:p="http://schemas.openxmlformats.org/presentationml/2006/main">
   <p:cSld>
     <p:spTree>
@@ -4842,6 +4677,15 @@
               <a:t>Use z-stacks to further disentangle filament growth from filament rotation</a:t>
             </a:r>
           </a:p>
+          <a:p>
+            <a:r>
+              <a:rPr lang="en-GB" dirty="0">
+                <a:latin typeface="Arial" panose="020B0604020202020204" pitchFamily="34" charset="0"/>
+                <a:cs typeface="Arial" panose="020B0604020202020204" pitchFamily="34" charset="0"/>
+              </a:rPr>
+              <a:t>Applying to situations with multiple filaments</a:t>
+            </a:r>
+          </a:p>
         </p:txBody>
       </p:sp>
     </p:spTree>
@@ -4857,7 +4701,7 @@
 </p:sld>
 </file>
 
-<file path=ppt/slides/slide6.xml><?xml version="1.0" encoding="utf-8"?>
+<file path=ppt/slides/slide5.xml><?xml version="1.0" encoding="utf-8"?>
 <p:sld xmlns:a="http://schemas.openxmlformats.org/drawingml/2006/main" xmlns:r="http://schemas.openxmlformats.org/officeDocument/2006/relationships" xmlns:p="http://schemas.openxmlformats.org/presentationml/2006/main">
   <p:cSld>
     <p:spTree>
@@ -5436,7 +5280,7 @@
 </p:sld>
 </file>
 
-<file path=ppt/slides/slide7.xml><?xml version="1.0" encoding="utf-8"?>
+<file path=ppt/slides/slide6.xml><?xml version="1.0" encoding="utf-8"?>
 <p:sld xmlns:a="http://schemas.openxmlformats.org/drawingml/2006/main" xmlns:r="http://schemas.openxmlformats.org/officeDocument/2006/relationships" xmlns:p="http://schemas.openxmlformats.org/presentationml/2006/main">
   <p:cSld>
     <p:spTree>

--- a/Presentations/Biohack_Presentation.pptx
+++ b/Presentations/Biohack_Presentation.pptx
@@ -4131,7 +4131,7 @@
         </p:blipFill>
         <p:spPr>
           <a:xfrm>
-            <a:off x="9818842" y="2689061"/>
+            <a:off x="9532403" y="2934168"/>
             <a:ext cx="1821396" cy="3122393"/>
           </a:xfrm>
           <a:prstGeom prst="rect">
@@ -4189,7 +4189,7 @@
         <p:spPr>
           <a:xfrm>
             <a:off x="838200" y="1825625"/>
-            <a:ext cx="7975294" cy="4351338"/>
+            <a:ext cx="7138012" cy="4351338"/>
           </a:xfrm>
         </p:spPr>
         <p:txBody>
@@ -4288,7 +4288,7 @@
         </p:blipFill>
         <p:spPr>
           <a:xfrm rot="19711490">
-            <a:off x="8301822" y="800567"/>
+            <a:off x="8015383" y="1045674"/>
             <a:ext cx="3697428" cy="1780243"/>
           </a:xfrm>
           <a:prstGeom prst="rect">
@@ -4310,7 +4310,7 @@
         </p:nvSpPr>
         <p:spPr>
           <a:xfrm rot="2900441">
-            <a:off x="9623586" y="1293914"/>
+            <a:off x="9337147" y="1539021"/>
             <a:ext cx="222530" cy="1238772"/>
           </a:xfrm>
           <a:prstGeom prst="can">
@@ -4513,7 +4513,7 @@
         <p:spPr>
           <a:xfrm>
             <a:off x="838200" y="1825625"/>
-            <a:ext cx="6807506" cy="4351338"/>
+            <a:ext cx="6322764" cy="4351338"/>
           </a:xfrm>
         </p:spPr>
         <p:txBody>
@@ -4655,7 +4655,12 @@
             <p:ph idx="1"/>
           </p:nvPr>
         </p:nvSpPr>
-        <p:spPr/>
+        <p:spPr>
+          <a:xfrm>
+            <a:off x="838200" y="1825625"/>
+            <a:ext cx="6862590" cy="4351338"/>
+          </a:xfrm>
+        </p:spPr>
         <p:txBody>
           <a:bodyPr/>
           <a:lstStyle/>
@@ -4674,6 +4679,15 @@
                 <a:latin typeface="Arial" panose="020B0604020202020204" pitchFamily="34" charset="0"/>
                 <a:cs typeface="Arial" panose="020B0604020202020204" pitchFamily="34" charset="0"/>
               </a:rPr>
+              <a:t>Using filament association with budding</a:t>
+            </a:r>
+          </a:p>
+          <a:p>
+            <a:r>
+              <a:rPr lang="en-GB" dirty="0">
+                <a:latin typeface="Arial" panose="020B0604020202020204" pitchFamily="34" charset="0"/>
+                <a:cs typeface="Arial" panose="020B0604020202020204" pitchFamily="34" charset="0"/>
+              </a:rPr>
               <a:t>Use z-stacks to further disentangle filament growth from filament rotation</a:t>
             </a:r>
           </a:p>
@@ -4688,6 +4702,789 @@
           </a:p>
         </p:txBody>
       </p:sp>
+      <p:grpSp>
+        <p:nvGrpSpPr>
+          <p:cNvPr id="3" name="Group 2">
+            <a:extLst>
+              <a:ext uri="{FF2B5EF4-FFF2-40B4-BE49-F238E27FC236}">
+                <a16:creationId xmlns:a16="http://schemas.microsoft.com/office/drawing/2014/main" id="{565911C7-BE4B-B1C9-F5D4-492D20C52EEC}"/>
+              </a:ext>
+            </a:extLst>
+          </p:cNvPr>
+          <p:cNvGrpSpPr/>
+          <p:nvPr/>
+        </p:nvGrpSpPr>
+        <p:grpSpPr>
+          <a:xfrm>
+            <a:off x="8217194" y="2675731"/>
+            <a:ext cx="3277879" cy="1325563"/>
+            <a:chOff x="3281475" y="3272117"/>
+            <a:chExt cx="5453354" cy="2205318"/>
+          </a:xfrm>
+        </p:grpSpPr>
+        <p:sp>
+          <p:nvSpPr>
+            <p:cNvPr id="4" name="Can 3">
+              <a:extLst>
+                <a:ext uri="{FF2B5EF4-FFF2-40B4-BE49-F238E27FC236}">
+                  <a16:creationId xmlns:a16="http://schemas.microsoft.com/office/drawing/2014/main" id="{8B7E78D0-AAF0-59ED-5071-48D6EBCD12F7}"/>
+                </a:ext>
+              </a:extLst>
+            </p:cNvPr>
+            <p:cNvSpPr/>
+            <p:nvPr/>
+          </p:nvSpPr>
+          <p:spPr>
+            <a:xfrm rot="2900441">
+              <a:off x="7563151" y="2595105"/>
+              <a:ext cx="356851" cy="1986504"/>
+            </a:xfrm>
+            <a:prstGeom prst="can">
+              <a:avLst/>
+            </a:prstGeom>
+            <a:solidFill>
+              <a:schemeClr val="accent3">
+                <a:lumMod val="50000"/>
+              </a:schemeClr>
+            </a:solidFill>
+          </p:spPr>
+          <p:style>
+            <a:lnRef idx="2">
+              <a:schemeClr val="accent1">
+                <a:shade val="15000"/>
+              </a:schemeClr>
+            </a:lnRef>
+            <a:fillRef idx="1">
+              <a:schemeClr val="accent1"/>
+            </a:fillRef>
+            <a:effectRef idx="0">
+              <a:schemeClr val="accent1"/>
+            </a:effectRef>
+            <a:fontRef idx="minor">
+              <a:schemeClr val="lt1"/>
+            </a:fontRef>
+          </p:style>
+          <p:txBody>
+            <a:bodyPr rtlCol="0" anchor="ctr"/>
+            <a:lstStyle/>
+            <a:p>
+              <a:pPr algn="ctr"/>
+              <a:endParaRPr lang="en-GB"/>
+            </a:p>
+          </p:txBody>
+        </p:sp>
+        <p:sp>
+          <p:nvSpPr>
+            <p:cNvPr id="6" name="Oval 5">
+              <a:extLst>
+                <a:ext uri="{FF2B5EF4-FFF2-40B4-BE49-F238E27FC236}">
+                  <a16:creationId xmlns:a16="http://schemas.microsoft.com/office/drawing/2014/main" id="{8C1FFF08-65DD-DDBF-E792-99B85A1F2DBD}"/>
+                </a:ext>
+              </a:extLst>
+            </p:cNvPr>
+            <p:cNvSpPr/>
+            <p:nvPr/>
+          </p:nvSpPr>
+          <p:spPr>
+            <a:xfrm>
+              <a:off x="3747454" y="3414356"/>
+              <a:ext cx="348009" cy="348009"/>
+            </a:xfrm>
+            <a:prstGeom prst="ellipse">
+              <a:avLst/>
+            </a:prstGeom>
+            <a:solidFill>
+              <a:srgbClr val="6E8671"/>
+            </a:solidFill>
+          </p:spPr>
+          <p:style>
+            <a:lnRef idx="2">
+              <a:schemeClr val="accent1">
+                <a:shade val="15000"/>
+              </a:schemeClr>
+            </a:lnRef>
+            <a:fillRef idx="1">
+              <a:schemeClr val="accent1"/>
+            </a:fillRef>
+            <a:effectRef idx="0">
+              <a:schemeClr val="accent1"/>
+            </a:effectRef>
+            <a:fontRef idx="minor">
+              <a:schemeClr val="lt1"/>
+            </a:fontRef>
+          </p:style>
+          <p:txBody>
+            <a:bodyPr rtlCol="0" anchor="ctr"/>
+            <a:lstStyle/>
+            <a:p>
+              <a:pPr algn="ctr"/>
+              <a:endParaRPr lang="en-GB"/>
+            </a:p>
+          </p:txBody>
+        </p:sp>
+        <p:sp>
+          <p:nvSpPr>
+            <p:cNvPr id="7" name="Can 6">
+              <a:extLst>
+                <a:ext uri="{FF2B5EF4-FFF2-40B4-BE49-F238E27FC236}">
+                  <a16:creationId xmlns:a16="http://schemas.microsoft.com/office/drawing/2014/main" id="{D4713A1C-838E-62CC-F9AB-BF540BD0BE47}"/>
+                </a:ext>
+              </a:extLst>
+            </p:cNvPr>
+            <p:cNvSpPr/>
+            <p:nvPr/>
+          </p:nvSpPr>
+          <p:spPr>
+            <a:xfrm rot="2900441">
+              <a:off x="5407919" y="3064930"/>
+              <a:ext cx="356851" cy="1046851"/>
+            </a:xfrm>
+            <a:prstGeom prst="can">
+              <a:avLst/>
+            </a:prstGeom>
+            <a:solidFill>
+              <a:schemeClr val="accent3">
+                <a:lumMod val="50000"/>
+              </a:schemeClr>
+            </a:solidFill>
+          </p:spPr>
+          <p:style>
+            <a:lnRef idx="2">
+              <a:schemeClr val="accent1">
+                <a:shade val="15000"/>
+              </a:schemeClr>
+            </a:lnRef>
+            <a:fillRef idx="1">
+              <a:schemeClr val="accent1"/>
+            </a:fillRef>
+            <a:effectRef idx="0">
+              <a:schemeClr val="accent1"/>
+            </a:effectRef>
+            <a:fontRef idx="minor">
+              <a:schemeClr val="lt1"/>
+            </a:fontRef>
+          </p:style>
+          <p:txBody>
+            <a:bodyPr rtlCol="0" anchor="ctr"/>
+            <a:lstStyle/>
+            <a:p>
+              <a:pPr algn="ctr"/>
+              <a:endParaRPr lang="en-GB"/>
+            </a:p>
+          </p:txBody>
+        </p:sp>
+        <p:sp>
+          <p:nvSpPr>
+            <p:cNvPr id="8" name="Oval 7">
+              <a:extLst>
+                <a:ext uri="{FF2B5EF4-FFF2-40B4-BE49-F238E27FC236}">
+                  <a16:creationId xmlns:a16="http://schemas.microsoft.com/office/drawing/2014/main" id="{47430F0C-7294-14B5-4A39-91554C49D35E}"/>
+                </a:ext>
+              </a:extLst>
+            </p:cNvPr>
+            <p:cNvSpPr/>
+            <p:nvPr/>
+          </p:nvSpPr>
+          <p:spPr>
+            <a:xfrm>
+              <a:off x="3747453" y="4978697"/>
+              <a:ext cx="348009" cy="348009"/>
+            </a:xfrm>
+            <a:prstGeom prst="ellipse">
+              <a:avLst/>
+            </a:prstGeom>
+            <a:solidFill>
+              <a:srgbClr val="6E8671"/>
+            </a:solidFill>
+          </p:spPr>
+          <p:style>
+            <a:lnRef idx="2">
+              <a:schemeClr val="accent1">
+                <a:shade val="15000"/>
+              </a:schemeClr>
+            </a:lnRef>
+            <a:fillRef idx="1">
+              <a:schemeClr val="accent1"/>
+            </a:fillRef>
+            <a:effectRef idx="0">
+              <a:schemeClr val="accent1"/>
+            </a:effectRef>
+            <a:fontRef idx="minor">
+              <a:schemeClr val="lt1"/>
+            </a:fontRef>
+          </p:style>
+          <p:txBody>
+            <a:bodyPr rtlCol="0" anchor="ctr"/>
+            <a:lstStyle/>
+            <a:p>
+              <a:pPr algn="ctr"/>
+              <a:endParaRPr lang="en-GB"/>
+            </a:p>
+          </p:txBody>
+        </p:sp>
+        <p:sp>
+          <p:nvSpPr>
+            <p:cNvPr id="9" name="Oval 8">
+              <a:extLst>
+                <a:ext uri="{FF2B5EF4-FFF2-40B4-BE49-F238E27FC236}">
+                  <a16:creationId xmlns:a16="http://schemas.microsoft.com/office/drawing/2014/main" id="{63180C78-4E38-DD88-7889-45A3D2F801E7}"/>
+                </a:ext>
+              </a:extLst>
+            </p:cNvPr>
+            <p:cNvSpPr/>
+            <p:nvPr/>
+          </p:nvSpPr>
+          <p:spPr>
+            <a:xfrm>
+              <a:off x="5412339" y="4978696"/>
+              <a:ext cx="348009" cy="348009"/>
+            </a:xfrm>
+            <a:prstGeom prst="ellipse">
+              <a:avLst/>
+            </a:prstGeom>
+            <a:solidFill>
+              <a:srgbClr val="6E8671"/>
+            </a:solidFill>
+          </p:spPr>
+          <p:style>
+            <a:lnRef idx="2">
+              <a:schemeClr val="accent1">
+                <a:shade val="15000"/>
+              </a:schemeClr>
+            </a:lnRef>
+            <a:fillRef idx="1">
+              <a:schemeClr val="accent1"/>
+            </a:fillRef>
+            <a:effectRef idx="0">
+              <a:schemeClr val="accent1"/>
+            </a:effectRef>
+            <a:fontRef idx="minor">
+              <a:schemeClr val="lt1"/>
+            </a:fontRef>
+          </p:style>
+          <p:txBody>
+            <a:bodyPr rtlCol="0" anchor="ctr"/>
+            <a:lstStyle/>
+            <a:p>
+              <a:pPr algn="ctr"/>
+              <a:endParaRPr lang="en-GB"/>
+            </a:p>
+          </p:txBody>
+        </p:sp>
+        <p:sp>
+          <p:nvSpPr>
+            <p:cNvPr id="10" name="Oval 9">
+              <a:extLst>
+                <a:ext uri="{FF2B5EF4-FFF2-40B4-BE49-F238E27FC236}">
+                  <a16:creationId xmlns:a16="http://schemas.microsoft.com/office/drawing/2014/main" id="{BB1D69C5-1F72-745D-8B87-C1888A229DDA}"/>
+                </a:ext>
+              </a:extLst>
+            </p:cNvPr>
+            <p:cNvSpPr/>
+            <p:nvPr/>
+          </p:nvSpPr>
+          <p:spPr>
+            <a:xfrm>
+              <a:off x="7567571" y="4978696"/>
+              <a:ext cx="348009" cy="348009"/>
+            </a:xfrm>
+            <a:prstGeom prst="ellipse">
+              <a:avLst/>
+            </a:prstGeom>
+            <a:solidFill>
+              <a:srgbClr val="6E8671"/>
+            </a:solidFill>
+          </p:spPr>
+          <p:style>
+            <a:lnRef idx="2">
+              <a:schemeClr val="accent1">
+                <a:shade val="15000"/>
+              </a:schemeClr>
+            </a:lnRef>
+            <a:fillRef idx="1">
+              <a:schemeClr val="accent1"/>
+            </a:fillRef>
+            <a:effectRef idx="0">
+              <a:schemeClr val="accent1"/>
+            </a:effectRef>
+            <a:fontRef idx="minor">
+              <a:schemeClr val="lt1"/>
+            </a:fontRef>
+          </p:style>
+          <p:txBody>
+            <a:bodyPr rtlCol="0" anchor="ctr"/>
+            <a:lstStyle/>
+            <a:p>
+              <a:pPr algn="ctr"/>
+              <a:endParaRPr lang="en-GB"/>
+            </a:p>
+          </p:txBody>
+        </p:sp>
+        <p:cxnSp>
+          <p:nvCxnSpPr>
+            <p:cNvPr id="11" name="Straight Arrow Connector 10">
+              <a:extLst>
+                <a:ext uri="{FF2B5EF4-FFF2-40B4-BE49-F238E27FC236}">
+                  <a16:creationId xmlns:a16="http://schemas.microsoft.com/office/drawing/2014/main" id="{A56E1C4F-C67D-66CA-A761-64A6EC1F4BDD}"/>
+                </a:ext>
+              </a:extLst>
+            </p:cNvPr>
+            <p:cNvCxnSpPr>
+              <a:cxnSpLocks/>
+            </p:cNvCxnSpPr>
+            <p:nvPr/>
+          </p:nvCxnSpPr>
+          <p:spPr>
+            <a:xfrm>
+              <a:off x="4331710" y="3588355"/>
+              <a:ext cx="499404" cy="0"/>
+            </a:xfrm>
+            <a:prstGeom prst="straightConnector1">
+              <a:avLst/>
+            </a:prstGeom>
+            <a:ln w="38100">
+              <a:solidFill>
+                <a:schemeClr val="tx1"/>
+              </a:solidFill>
+              <a:tailEnd type="triangle"/>
+            </a:ln>
+          </p:spPr>
+          <p:style>
+            <a:lnRef idx="2">
+              <a:schemeClr val="accent1"/>
+            </a:lnRef>
+            <a:fillRef idx="0">
+              <a:schemeClr val="accent1"/>
+            </a:fillRef>
+            <a:effectRef idx="1">
+              <a:schemeClr val="accent1"/>
+            </a:effectRef>
+            <a:fontRef idx="minor">
+              <a:schemeClr val="tx1"/>
+            </a:fontRef>
+          </p:style>
+        </p:cxnSp>
+        <p:cxnSp>
+          <p:nvCxnSpPr>
+            <p:cNvPr id="12" name="Straight Arrow Connector 11">
+              <a:extLst>
+                <a:ext uri="{FF2B5EF4-FFF2-40B4-BE49-F238E27FC236}">
+                  <a16:creationId xmlns:a16="http://schemas.microsoft.com/office/drawing/2014/main" id="{E6B5D9BE-5F58-FB9C-E28D-047A80F1B5F3}"/>
+                </a:ext>
+              </a:extLst>
+            </p:cNvPr>
+            <p:cNvCxnSpPr>
+              <a:cxnSpLocks/>
+            </p:cNvCxnSpPr>
+            <p:nvPr/>
+          </p:nvCxnSpPr>
+          <p:spPr>
+            <a:xfrm>
+              <a:off x="6381504" y="3588355"/>
+              <a:ext cx="499404" cy="0"/>
+            </a:xfrm>
+            <a:prstGeom prst="straightConnector1">
+              <a:avLst/>
+            </a:prstGeom>
+            <a:ln w="38100">
+              <a:solidFill>
+                <a:schemeClr val="tx1"/>
+              </a:solidFill>
+              <a:tailEnd type="triangle"/>
+            </a:ln>
+          </p:spPr>
+          <p:style>
+            <a:lnRef idx="2">
+              <a:schemeClr val="accent1"/>
+            </a:lnRef>
+            <a:fillRef idx="0">
+              <a:schemeClr val="accent1"/>
+            </a:fillRef>
+            <a:effectRef idx="1">
+              <a:schemeClr val="accent1"/>
+            </a:effectRef>
+            <a:fontRef idx="minor">
+              <a:schemeClr val="tx1"/>
+            </a:fontRef>
+          </p:style>
+        </p:cxnSp>
+        <p:cxnSp>
+          <p:nvCxnSpPr>
+            <p:cNvPr id="13" name="Straight Arrow Connector 12">
+              <a:extLst>
+                <a:ext uri="{FF2B5EF4-FFF2-40B4-BE49-F238E27FC236}">
+                  <a16:creationId xmlns:a16="http://schemas.microsoft.com/office/drawing/2014/main" id="{72812543-192D-8DD9-6C16-4F570D0D5BDE}"/>
+                </a:ext>
+              </a:extLst>
+            </p:cNvPr>
+            <p:cNvCxnSpPr>
+              <a:cxnSpLocks/>
+            </p:cNvCxnSpPr>
+            <p:nvPr/>
+          </p:nvCxnSpPr>
+          <p:spPr>
+            <a:xfrm>
+              <a:off x="4331710" y="5152700"/>
+              <a:ext cx="499404" cy="0"/>
+            </a:xfrm>
+            <a:prstGeom prst="straightConnector1">
+              <a:avLst/>
+            </a:prstGeom>
+            <a:ln w="38100">
+              <a:solidFill>
+                <a:schemeClr val="tx1"/>
+              </a:solidFill>
+              <a:tailEnd type="triangle"/>
+            </a:ln>
+          </p:spPr>
+          <p:style>
+            <a:lnRef idx="2">
+              <a:schemeClr val="accent1"/>
+            </a:lnRef>
+            <a:fillRef idx="0">
+              <a:schemeClr val="accent1"/>
+            </a:fillRef>
+            <a:effectRef idx="1">
+              <a:schemeClr val="accent1"/>
+            </a:effectRef>
+            <a:fontRef idx="minor">
+              <a:schemeClr val="tx1"/>
+            </a:fontRef>
+          </p:style>
+        </p:cxnSp>
+        <p:cxnSp>
+          <p:nvCxnSpPr>
+            <p:cNvPr id="14" name="Straight Arrow Connector 13">
+              <a:extLst>
+                <a:ext uri="{FF2B5EF4-FFF2-40B4-BE49-F238E27FC236}">
+                  <a16:creationId xmlns:a16="http://schemas.microsoft.com/office/drawing/2014/main" id="{FEA9DAF5-78CD-5C78-94DB-DE5B3D03FE72}"/>
+                </a:ext>
+              </a:extLst>
+            </p:cNvPr>
+            <p:cNvCxnSpPr>
+              <a:cxnSpLocks/>
+            </p:cNvCxnSpPr>
+            <p:nvPr/>
+          </p:nvCxnSpPr>
+          <p:spPr>
+            <a:xfrm>
+              <a:off x="6381504" y="5152700"/>
+              <a:ext cx="499404" cy="0"/>
+            </a:xfrm>
+            <a:prstGeom prst="straightConnector1">
+              <a:avLst/>
+            </a:prstGeom>
+            <a:ln w="38100">
+              <a:solidFill>
+                <a:schemeClr val="tx1"/>
+              </a:solidFill>
+              <a:tailEnd type="triangle"/>
+            </a:ln>
+          </p:spPr>
+          <p:style>
+            <a:lnRef idx="2">
+              <a:schemeClr val="accent1"/>
+            </a:lnRef>
+            <a:fillRef idx="0">
+              <a:schemeClr val="accent1"/>
+            </a:fillRef>
+            <a:effectRef idx="1">
+              <a:schemeClr val="accent1"/>
+            </a:effectRef>
+            <a:fontRef idx="minor">
+              <a:schemeClr val="tx1"/>
+            </a:fontRef>
+          </p:style>
+        </p:cxnSp>
+        <p:grpSp>
+          <p:nvGrpSpPr>
+            <p:cNvPr id="15" name="Group 14">
+              <a:extLst>
+                <a:ext uri="{FF2B5EF4-FFF2-40B4-BE49-F238E27FC236}">
+                  <a16:creationId xmlns:a16="http://schemas.microsoft.com/office/drawing/2014/main" id="{861DA4BE-2FE8-3F68-FD53-6CCE8911F5FE}"/>
+                </a:ext>
+              </a:extLst>
+            </p:cNvPr>
+            <p:cNvGrpSpPr/>
+            <p:nvPr/>
+          </p:nvGrpSpPr>
+          <p:grpSpPr>
+            <a:xfrm>
+              <a:off x="3281475" y="4840941"/>
+              <a:ext cx="5056094" cy="636494"/>
+              <a:chOff x="3249968" y="4840941"/>
+              <a:chExt cx="5056094" cy="636494"/>
+            </a:xfrm>
+          </p:grpSpPr>
+          <p:cxnSp>
+            <p:nvCxnSpPr>
+              <p:cNvPr id="20" name="Straight Connector 19">
+                <a:extLst>
+                  <a:ext uri="{FF2B5EF4-FFF2-40B4-BE49-F238E27FC236}">
+                    <a16:creationId xmlns:a16="http://schemas.microsoft.com/office/drawing/2014/main" id="{A4621921-9508-368D-1A0D-043B6A48C05D}"/>
+                  </a:ext>
+                </a:extLst>
+              </p:cNvPr>
+              <p:cNvCxnSpPr>
+                <a:cxnSpLocks/>
+              </p:cNvCxnSpPr>
+              <p:nvPr/>
+            </p:nvCxnSpPr>
+            <p:spPr>
+              <a:xfrm>
+                <a:off x="3249968" y="4840941"/>
+                <a:ext cx="5056094" cy="0"/>
+              </a:xfrm>
+              <a:prstGeom prst="line">
+                <a:avLst/>
+              </a:prstGeom>
+              <a:ln w="25400">
+                <a:prstDash val="dash"/>
+              </a:ln>
+            </p:spPr>
+            <p:style>
+              <a:lnRef idx="2">
+                <a:schemeClr val="dk1"/>
+              </a:lnRef>
+              <a:fillRef idx="0">
+                <a:schemeClr val="dk1"/>
+              </a:fillRef>
+              <a:effectRef idx="1">
+                <a:schemeClr val="dk1"/>
+              </a:effectRef>
+              <a:fontRef idx="minor">
+                <a:schemeClr val="tx1"/>
+              </a:fontRef>
+            </p:style>
+          </p:cxnSp>
+          <p:cxnSp>
+            <p:nvCxnSpPr>
+              <p:cNvPr id="21" name="Straight Connector 20">
+                <a:extLst>
+                  <a:ext uri="{FF2B5EF4-FFF2-40B4-BE49-F238E27FC236}">
+                    <a16:creationId xmlns:a16="http://schemas.microsoft.com/office/drawing/2014/main" id="{F76794E9-9202-57C2-0C4F-D9FB4EEA2EC3}"/>
+                  </a:ext>
+                </a:extLst>
+              </p:cNvPr>
+              <p:cNvCxnSpPr>
+                <a:cxnSpLocks/>
+              </p:cNvCxnSpPr>
+              <p:nvPr/>
+            </p:nvCxnSpPr>
+            <p:spPr>
+              <a:xfrm>
+                <a:off x="3249968" y="5159188"/>
+                <a:ext cx="5056094" cy="0"/>
+              </a:xfrm>
+              <a:prstGeom prst="line">
+                <a:avLst/>
+              </a:prstGeom>
+              <a:ln w="25400">
+                <a:prstDash val="dash"/>
+              </a:ln>
+            </p:spPr>
+            <p:style>
+              <a:lnRef idx="2">
+                <a:schemeClr val="dk1"/>
+              </a:lnRef>
+              <a:fillRef idx="0">
+                <a:schemeClr val="dk1"/>
+              </a:fillRef>
+              <a:effectRef idx="1">
+                <a:schemeClr val="dk1"/>
+              </a:effectRef>
+              <a:fontRef idx="minor">
+                <a:schemeClr val="tx1"/>
+              </a:fontRef>
+            </p:style>
+          </p:cxnSp>
+          <p:cxnSp>
+            <p:nvCxnSpPr>
+              <p:cNvPr id="22" name="Straight Connector 21">
+                <a:extLst>
+                  <a:ext uri="{FF2B5EF4-FFF2-40B4-BE49-F238E27FC236}">
+                    <a16:creationId xmlns:a16="http://schemas.microsoft.com/office/drawing/2014/main" id="{B40F2B9B-950F-F435-5DA7-8E1925E28D1C}"/>
+                  </a:ext>
+                </a:extLst>
+              </p:cNvPr>
+              <p:cNvCxnSpPr>
+                <a:cxnSpLocks/>
+              </p:cNvCxnSpPr>
+              <p:nvPr/>
+            </p:nvCxnSpPr>
+            <p:spPr>
+              <a:xfrm>
+                <a:off x="3249968" y="5477435"/>
+                <a:ext cx="5056094" cy="0"/>
+              </a:xfrm>
+              <a:prstGeom prst="line">
+                <a:avLst/>
+              </a:prstGeom>
+              <a:ln w="25400">
+                <a:prstDash val="dash"/>
+              </a:ln>
+            </p:spPr>
+            <p:style>
+              <a:lnRef idx="2">
+                <a:schemeClr val="dk1"/>
+              </a:lnRef>
+              <a:fillRef idx="0">
+                <a:schemeClr val="dk1"/>
+              </a:fillRef>
+              <a:effectRef idx="1">
+                <a:schemeClr val="dk1"/>
+              </a:effectRef>
+              <a:fontRef idx="minor">
+                <a:schemeClr val="tx1"/>
+              </a:fontRef>
+            </p:style>
+          </p:cxnSp>
+        </p:grpSp>
+        <p:grpSp>
+          <p:nvGrpSpPr>
+            <p:cNvPr id="16" name="Group 15">
+              <a:extLst>
+                <a:ext uri="{FF2B5EF4-FFF2-40B4-BE49-F238E27FC236}">
+                  <a16:creationId xmlns:a16="http://schemas.microsoft.com/office/drawing/2014/main" id="{5DEEB54D-E819-B402-45DF-59A78E6E6BF2}"/>
+                </a:ext>
+              </a:extLst>
+            </p:cNvPr>
+            <p:cNvGrpSpPr/>
+            <p:nvPr/>
+          </p:nvGrpSpPr>
+          <p:grpSpPr>
+            <a:xfrm>
+              <a:off x="3281475" y="3272117"/>
+              <a:ext cx="5056094" cy="636494"/>
+              <a:chOff x="3232301" y="3272117"/>
+              <a:chExt cx="5056094" cy="636494"/>
+            </a:xfrm>
+          </p:grpSpPr>
+          <p:cxnSp>
+            <p:nvCxnSpPr>
+              <p:cNvPr id="17" name="Straight Connector 16">
+                <a:extLst>
+                  <a:ext uri="{FF2B5EF4-FFF2-40B4-BE49-F238E27FC236}">
+                    <a16:creationId xmlns:a16="http://schemas.microsoft.com/office/drawing/2014/main" id="{7621E2FF-C6F7-0CA7-C2CB-3A13BCEE2AE8}"/>
+                  </a:ext>
+                </a:extLst>
+              </p:cNvPr>
+              <p:cNvCxnSpPr>
+                <a:cxnSpLocks/>
+              </p:cNvCxnSpPr>
+              <p:nvPr/>
+            </p:nvCxnSpPr>
+            <p:spPr>
+              <a:xfrm>
+                <a:off x="3232301" y="3272117"/>
+                <a:ext cx="5056094" cy="0"/>
+              </a:xfrm>
+              <a:prstGeom prst="line">
+                <a:avLst/>
+              </a:prstGeom>
+              <a:ln w="25400">
+                <a:prstDash val="dash"/>
+              </a:ln>
+            </p:spPr>
+            <p:style>
+              <a:lnRef idx="2">
+                <a:schemeClr val="dk1"/>
+              </a:lnRef>
+              <a:fillRef idx="0">
+                <a:schemeClr val="dk1"/>
+              </a:fillRef>
+              <a:effectRef idx="1">
+                <a:schemeClr val="dk1"/>
+              </a:effectRef>
+              <a:fontRef idx="minor">
+                <a:schemeClr val="tx1"/>
+              </a:fontRef>
+            </p:style>
+          </p:cxnSp>
+          <p:cxnSp>
+            <p:nvCxnSpPr>
+              <p:cNvPr id="18" name="Straight Connector 17">
+                <a:extLst>
+                  <a:ext uri="{FF2B5EF4-FFF2-40B4-BE49-F238E27FC236}">
+                    <a16:creationId xmlns:a16="http://schemas.microsoft.com/office/drawing/2014/main" id="{C57260A7-1883-5341-27C5-E407085A309F}"/>
+                  </a:ext>
+                </a:extLst>
+              </p:cNvPr>
+              <p:cNvCxnSpPr>
+                <a:cxnSpLocks/>
+              </p:cNvCxnSpPr>
+              <p:nvPr/>
+            </p:nvCxnSpPr>
+            <p:spPr>
+              <a:xfrm>
+                <a:off x="3232301" y="3590364"/>
+                <a:ext cx="5056094" cy="0"/>
+              </a:xfrm>
+              <a:prstGeom prst="line">
+                <a:avLst/>
+              </a:prstGeom>
+              <a:ln w="25400">
+                <a:prstDash val="dash"/>
+              </a:ln>
+            </p:spPr>
+            <p:style>
+              <a:lnRef idx="2">
+                <a:schemeClr val="dk1"/>
+              </a:lnRef>
+              <a:fillRef idx="0">
+                <a:schemeClr val="dk1"/>
+              </a:fillRef>
+              <a:effectRef idx="1">
+                <a:schemeClr val="dk1"/>
+              </a:effectRef>
+              <a:fontRef idx="minor">
+                <a:schemeClr val="tx1"/>
+              </a:fontRef>
+            </p:style>
+          </p:cxnSp>
+          <p:cxnSp>
+            <p:nvCxnSpPr>
+              <p:cNvPr id="19" name="Straight Connector 18">
+                <a:extLst>
+                  <a:ext uri="{FF2B5EF4-FFF2-40B4-BE49-F238E27FC236}">
+                    <a16:creationId xmlns:a16="http://schemas.microsoft.com/office/drawing/2014/main" id="{3C5AE048-433F-DA3F-16FF-FDE03C3E8EAB}"/>
+                  </a:ext>
+                </a:extLst>
+              </p:cNvPr>
+              <p:cNvCxnSpPr>
+                <a:cxnSpLocks/>
+              </p:cNvCxnSpPr>
+              <p:nvPr/>
+            </p:nvCxnSpPr>
+            <p:spPr>
+              <a:xfrm>
+                <a:off x="3232301" y="3908611"/>
+                <a:ext cx="5056094" cy="0"/>
+              </a:xfrm>
+              <a:prstGeom prst="line">
+                <a:avLst/>
+              </a:prstGeom>
+              <a:ln w="25400">
+                <a:prstDash val="dash"/>
+              </a:ln>
+            </p:spPr>
+            <p:style>
+              <a:lnRef idx="2">
+                <a:schemeClr val="dk1"/>
+              </a:lnRef>
+              <a:fillRef idx="0">
+                <a:schemeClr val="dk1"/>
+              </a:fillRef>
+              <a:effectRef idx="1">
+                <a:schemeClr val="dk1"/>
+              </a:effectRef>
+              <a:fontRef idx="minor">
+                <a:schemeClr val="tx1"/>
+              </a:fontRef>
+            </p:style>
+          </p:cxnSp>
+        </p:grpSp>
+      </p:grpSp>
     </p:spTree>
     <p:extLst>
       <p:ext uri="{BB962C8B-B14F-4D97-AF65-F5344CB8AC3E}">
@@ -5372,486 +6169,12 @@
           </a:p>
         </p:txBody>
       </p:sp>
-      <p:sp>
-        <p:nvSpPr>
-          <p:cNvPr id="3" name="Can 2">
-            <a:extLst>
-              <a:ext uri="{FF2B5EF4-FFF2-40B4-BE49-F238E27FC236}">
-                <a16:creationId xmlns:a16="http://schemas.microsoft.com/office/drawing/2014/main" id="{3DAB23B9-C289-756E-8828-116099F924B7}"/>
-              </a:ext>
-            </a:extLst>
-          </p:cNvPr>
-          <p:cNvSpPr/>
-          <p:nvPr/>
-        </p:nvSpPr>
-        <p:spPr>
-          <a:xfrm rot="2900441">
-            <a:off x="7563151" y="2595105"/>
-            <a:ext cx="356851" cy="1986504"/>
-          </a:xfrm>
-          <a:prstGeom prst="can">
-            <a:avLst/>
-          </a:prstGeom>
-          <a:solidFill>
-            <a:schemeClr val="accent3">
-              <a:lumMod val="50000"/>
-            </a:schemeClr>
-          </a:solidFill>
-        </p:spPr>
-        <p:style>
-          <a:lnRef idx="2">
-            <a:schemeClr val="accent1">
-              <a:shade val="15000"/>
-            </a:schemeClr>
-          </a:lnRef>
-          <a:fillRef idx="1">
-            <a:schemeClr val="accent1"/>
-          </a:fillRef>
-          <a:effectRef idx="0">
-            <a:schemeClr val="accent1"/>
-          </a:effectRef>
-          <a:fontRef idx="minor">
-            <a:schemeClr val="lt1"/>
-          </a:fontRef>
-        </p:style>
-        <p:txBody>
-          <a:bodyPr rtlCol="0" anchor="ctr"/>
-          <a:lstStyle/>
-          <a:p>
-            <a:pPr algn="ctr"/>
-            <a:endParaRPr lang="en-GB"/>
-          </a:p>
-        </p:txBody>
-      </p:sp>
-      <p:sp>
-        <p:nvSpPr>
-          <p:cNvPr id="4" name="Oval 3">
-            <a:extLst>
-              <a:ext uri="{FF2B5EF4-FFF2-40B4-BE49-F238E27FC236}">
-                <a16:creationId xmlns:a16="http://schemas.microsoft.com/office/drawing/2014/main" id="{1DF91532-1A43-08CD-FDFC-4460AD705EAB}"/>
-              </a:ext>
-            </a:extLst>
-          </p:cNvPr>
-          <p:cNvSpPr/>
-          <p:nvPr/>
-        </p:nvSpPr>
-        <p:spPr>
-          <a:xfrm>
-            <a:off x="3747454" y="3414356"/>
-            <a:ext cx="348009" cy="348009"/>
-          </a:xfrm>
-          <a:prstGeom prst="ellipse">
-            <a:avLst/>
-          </a:prstGeom>
-          <a:solidFill>
-            <a:srgbClr val="6E8671"/>
-          </a:solidFill>
-        </p:spPr>
-        <p:style>
-          <a:lnRef idx="2">
-            <a:schemeClr val="accent1">
-              <a:shade val="15000"/>
-            </a:schemeClr>
-          </a:lnRef>
-          <a:fillRef idx="1">
-            <a:schemeClr val="accent1"/>
-          </a:fillRef>
-          <a:effectRef idx="0">
-            <a:schemeClr val="accent1"/>
-          </a:effectRef>
-          <a:fontRef idx="minor">
-            <a:schemeClr val="lt1"/>
-          </a:fontRef>
-        </p:style>
-        <p:txBody>
-          <a:bodyPr rtlCol="0" anchor="ctr"/>
-          <a:lstStyle/>
-          <a:p>
-            <a:pPr algn="ctr"/>
-            <a:endParaRPr lang="en-GB"/>
-          </a:p>
-        </p:txBody>
-      </p:sp>
-      <p:sp>
-        <p:nvSpPr>
-          <p:cNvPr id="6" name="Can 5">
-            <a:extLst>
-              <a:ext uri="{FF2B5EF4-FFF2-40B4-BE49-F238E27FC236}">
-                <a16:creationId xmlns:a16="http://schemas.microsoft.com/office/drawing/2014/main" id="{95586217-3ED9-6C08-C92F-107453677F3D}"/>
-              </a:ext>
-            </a:extLst>
-          </p:cNvPr>
-          <p:cNvSpPr/>
-          <p:nvPr/>
-        </p:nvSpPr>
-        <p:spPr>
-          <a:xfrm rot="2900441">
-            <a:off x="5407919" y="3064930"/>
-            <a:ext cx="356851" cy="1046851"/>
-          </a:xfrm>
-          <a:prstGeom prst="can">
-            <a:avLst/>
-          </a:prstGeom>
-          <a:solidFill>
-            <a:schemeClr val="accent3">
-              <a:lumMod val="50000"/>
-            </a:schemeClr>
-          </a:solidFill>
-        </p:spPr>
-        <p:style>
-          <a:lnRef idx="2">
-            <a:schemeClr val="accent1">
-              <a:shade val="15000"/>
-            </a:schemeClr>
-          </a:lnRef>
-          <a:fillRef idx="1">
-            <a:schemeClr val="accent1"/>
-          </a:fillRef>
-          <a:effectRef idx="0">
-            <a:schemeClr val="accent1"/>
-          </a:effectRef>
-          <a:fontRef idx="minor">
-            <a:schemeClr val="lt1"/>
-          </a:fontRef>
-        </p:style>
-        <p:txBody>
-          <a:bodyPr rtlCol="0" anchor="ctr"/>
-          <a:lstStyle/>
-          <a:p>
-            <a:pPr algn="ctr"/>
-            <a:endParaRPr lang="en-GB"/>
-          </a:p>
-        </p:txBody>
-      </p:sp>
-      <p:sp>
-        <p:nvSpPr>
-          <p:cNvPr id="9" name="Oval 8">
-            <a:extLst>
-              <a:ext uri="{FF2B5EF4-FFF2-40B4-BE49-F238E27FC236}">
-                <a16:creationId xmlns:a16="http://schemas.microsoft.com/office/drawing/2014/main" id="{C3960152-F5D0-BE75-7D73-2AD6F9403A61}"/>
-              </a:ext>
-            </a:extLst>
-          </p:cNvPr>
-          <p:cNvSpPr/>
-          <p:nvPr/>
-        </p:nvSpPr>
-        <p:spPr>
-          <a:xfrm>
-            <a:off x="3747453" y="4978697"/>
-            <a:ext cx="348009" cy="348009"/>
-          </a:xfrm>
-          <a:prstGeom prst="ellipse">
-            <a:avLst/>
-          </a:prstGeom>
-          <a:solidFill>
-            <a:srgbClr val="6E8671"/>
-          </a:solidFill>
-        </p:spPr>
-        <p:style>
-          <a:lnRef idx="2">
-            <a:schemeClr val="accent1">
-              <a:shade val="15000"/>
-            </a:schemeClr>
-          </a:lnRef>
-          <a:fillRef idx="1">
-            <a:schemeClr val="accent1"/>
-          </a:fillRef>
-          <a:effectRef idx="0">
-            <a:schemeClr val="accent1"/>
-          </a:effectRef>
-          <a:fontRef idx="minor">
-            <a:schemeClr val="lt1"/>
-          </a:fontRef>
-        </p:style>
-        <p:txBody>
-          <a:bodyPr rtlCol="0" anchor="ctr"/>
-          <a:lstStyle/>
-          <a:p>
-            <a:pPr algn="ctr"/>
-            <a:endParaRPr lang="en-GB"/>
-          </a:p>
-        </p:txBody>
-      </p:sp>
-      <p:sp>
-        <p:nvSpPr>
-          <p:cNvPr id="10" name="Oval 9">
-            <a:extLst>
-              <a:ext uri="{FF2B5EF4-FFF2-40B4-BE49-F238E27FC236}">
-                <a16:creationId xmlns:a16="http://schemas.microsoft.com/office/drawing/2014/main" id="{FA5CE578-F6D5-D870-65B2-7697F5B12839}"/>
-              </a:ext>
-            </a:extLst>
-          </p:cNvPr>
-          <p:cNvSpPr/>
-          <p:nvPr/>
-        </p:nvSpPr>
-        <p:spPr>
-          <a:xfrm>
-            <a:off x="5412339" y="4978696"/>
-            <a:ext cx="348009" cy="348009"/>
-          </a:xfrm>
-          <a:prstGeom prst="ellipse">
-            <a:avLst/>
-          </a:prstGeom>
-          <a:solidFill>
-            <a:srgbClr val="6E8671"/>
-          </a:solidFill>
-        </p:spPr>
-        <p:style>
-          <a:lnRef idx="2">
-            <a:schemeClr val="accent1">
-              <a:shade val="15000"/>
-            </a:schemeClr>
-          </a:lnRef>
-          <a:fillRef idx="1">
-            <a:schemeClr val="accent1"/>
-          </a:fillRef>
-          <a:effectRef idx="0">
-            <a:schemeClr val="accent1"/>
-          </a:effectRef>
-          <a:fontRef idx="minor">
-            <a:schemeClr val="lt1"/>
-          </a:fontRef>
-        </p:style>
-        <p:txBody>
-          <a:bodyPr rtlCol="0" anchor="ctr"/>
-          <a:lstStyle/>
-          <a:p>
-            <a:pPr algn="ctr"/>
-            <a:endParaRPr lang="en-GB"/>
-          </a:p>
-        </p:txBody>
-      </p:sp>
-      <p:sp>
-        <p:nvSpPr>
-          <p:cNvPr id="11" name="Oval 10">
-            <a:extLst>
-              <a:ext uri="{FF2B5EF4-FFF2-40B4-BE49-F238E27FC236}">
-                <a16:creationId xmlns:a16="http://schemas.microsoft.com/office/drawing/2014/main" id="{6119C1A7-4E86-AC45-4FCF-1113C18CFC60}"/>
-              </a:ext>
-            </a:extLst>
-          </p:cNvPr>
-          <p:cNvSpPr/>
-          <p:nvPr/>
-        </p:nvSpPr>
-        <p:spPr>
-          <a:xfrm>
-            <a:off x="7567571" y="4978696"/>
-            <a:ext cx="348009" cy="348009"/>
-          </a:xfrm>
-          <a:prstGeom prst="ellipse">
-            <a:avLst/>
-          </a:prstGeom>
-          <a:solidFill>
-            <a:srgbClr val="6E8671"/>
-          </a:solidFill>
-        </p:spPr>
-        <p:style>
-          <a:lnRef idx="2">
-            <a:schemeClr val="accent1">
-              <a:shade val="15000"/>
-            </a:schemeClr>
-          </a:lnRef>
-          <a:fillRef idx="1">
-            <a:schemeClr val="accent1"/>
-          </a:fillRef>
-          <a:effectRef idx="0">
-            <a:schemeClr val="accent1"/>
-          </a:effectRef>
-          <a:fontRef idx="minor">
-            <a:schemeClr val="lt1"/>
-          </a:fontRef>
-        </p:style>
-        <p:txBody>
-          <a:bodyPr rtlCol="0" anchor="ctr"/>
-          <a:lstStyle/>
-          <a:p>
-            <a:pPr algn="ctr"/>
-            <a:endParaRPr lang="en-GB"/>
-          </a:p>
-        </p:txBody>
-      </p:sp>
-      <p:cxnSp>
-        <p:nvCxnSpPr>
-          <p:cNvPr id="13" name="Straight Arrow Connector 12">
-            <a:extLst>
-              <a:ext uri="{FF2B5EF4-FFF2-40B4-BE49-F238E27FC236}">
-                <a16:creationId xmlns:a16="http://schemas.microsoft.com/office/drawing/2014/main" id="{2D3DBCC2-AA03-399F-E0E7-2667ADD80386}"/>
-              </a:ext>
-            </a:extLst>
-          </p:cNvPr>
-          <p:cNvCxnSpPr>
-            <a:cxnSpLocks/>
-          </p:cNvCxnSpPr>
-          <p:nvPr/>
-        </p:nvCxnSpPr>
-        <p:spPr>
-          <a:xfrm>
-            <a:off x="4331710" y="3588355"/>
-            <a:ext cx="499404" cy="0"/>
-          </a:xfrm>
-          <a:prstGeom prst="straightConnector1">
-            <a:avLst/>
-          </a:prstGeom>
-          <a:ln w="38100">
-            <a:solidFill>
-              <a:schemeClr val="tx1"/>
-            </a:solidFill>
-            <a:tailEnd type="triangle"/>
-          </a:ln>
-        </p:spPr>
-        <p:style>
-          <a:lnRef idx="2">
-            <a:schemeClr val="accent1"/>
-          </a:lnRef>
-          <a:fillRef idx="0">
-            <a:schemeClr val="accent1"/>
-          </a:fillRef>
-          <a:effectRef idx="1">
-            <a:schemeClr val="accent1"/>
-          </a:effectRef>
-          <a:fontRef idx="minor">
-            <a:schemeClr val="tx1"/>
-          </a:fontRef>
-        </p:style>
-      </p:cxnSp>
-      <p:cxnSp>
-        <p:nvCxnSpPr>
-          <p:cNvPr id="15" name="Straight Arrow Connector 14">
-            <a:extLst>
-              <a:ext uri="{FF2B5EF4-FFF2-40B4-BE49-F238E27FC236}">
-                <a16:creationId xmlns:a16="http://schemas.microsoft.com/office/drawing/2014/main" id="{44EF35F8-87E6-40F1-B29C-695AB7BE1D1B}"/>
-              </a:ext>
-            </a:extLst>
-          </p:cNvPr>
-          <p:cNvCxnSpPr>
-            <a:cxnSpLocks/>
-          </p:cNvCxnSpPr>
-          <p:nvPr/>
-        </p:nvCxnSpPr>
-        <p:spPr>
-          <a:xfrm>
-            <a:off x="6381504" y="3588355"/>
-            <a:ext cx="499404" cy="0"/>
-          </a:xfrm>
-          <a:prstGeom prst="straightConnector1">
-            <a:avLst/>
-          </a:prstGeom>
-          <a:ln w="38100">
-            <a:solidFill>
-              <a:schemeClr val="tx1"/>
-            </a:solidFill>
-            <a:tailEnd type="triangle"/>
-          </a:ln>
-        </p:spPr>
-        <p:style>
-          <a:lnRef idx="2">
-            <a:schemeClr val="accent1"/>
-          </a:lnRef>
-          <a:fillRef idx="0">
-            <a:schemeClr val="accent1"/>
-          </a:fillRef>
-          <a:effectRef idx="1">
-            <a:schemeClr val="accent1"/>
-          </a:effectRef>
-          <a:fontRef idx="minor">
-            <a:schemeClr val="tx1"/>
-          </a:fontRef>
-        </p:style>
-      </p:cxnSp>
-      <p:cxnSp>
-        <p:nvCxnSpPr>
-          <p:cNvPr id="16" name="Straight Arrow Connector 15">
-            <a:extLst>
-              <a:ext uri="{FF2B5EF4-FFF2-40B4-BE49-F238E27FC236}">
-                <a16:creationId xmlns:a16="http://schemas.microsoft.com/office/drawing/2014/main" id="{C3D33A4D-9FEE-681F-E292-E65AC2D374EA}"/>
-              </a:ext>
-            </a:extLst>
-          </p:cNvPr>
-          <p:cNvCxnSpPr>
-            <a:cxnSpLocks/>
-          </p:cNvCxnSpPr>
-          <p:nvPr/>
-        </p:nvCxnSpPr>
-        <p:spPr>
-          <a:xfrm>
-            <a:off x="4331710" y="5152700"/>
-            <a:ext cx="499404" cy="0"/>
-          </a:xfrm>
-          <a:prstGeom prst="straightConnector1">
-            <a:avLst/>
-          </a:prstGeom>
-          <a:ln w="38100">
-            <a:solidFill>
-              <a:schemeClr val="tx1"/>
-            </a:solidFill>
-            <a:tailEnd type="triangle"/>
-          </a:ln>
-        </p:spPr>
-        <p:style>
-          <a:lnRef idx="2">
-            <a:schemeClr val="accent1"/>
-          </a:lnRef>
-          <a:fillRef idx="0">
-            <a:schemeClr val="accent1"/>
-          </a:fillRef>
-          <a:effectRef idx="1">
-            <a:schemeClr val="accent1"/>
-          </a:effectRef>
-          <a:fontRef idx="minor">
-            <a:schemeClr val="tx1"/>
-          </a:fontRef>
-        </p:style>
-      </p:cxnSp>
-      <p:cxnSp>
-        <p:nvCxnSpPr>
-          <p:cNvPr id="17" name="Straight Arrow Connector 16">
-            <a:extLst>
-              <a:ext uri="{FF2B5EF4-FFF2-40B4-BE49-F238E27FC236}">
-                <a16:creationId xmlns:a16="http://schemas.microsoft.com/office/drawing/2014/main" id="{D2F1987E-D891-D8FF-9545-BE54719A1221}"/>
-              </a:ext>
-            </a:extLst>
-          </p:cNvPr>
-          <p:cNvCxnSpPr>
-            <a:cxnSpLocks/>
-          </p:cNvCxnSpPr>
-          <p:nvPr/>
-        </p:nvCxnSpPr>
-        <p:spPr>
-          <a:xfrm>
-            <a:off x="6381504" y="5152700"/>
-            <a:ext cx="499404" cy="0"/>
-          </a:xfrm>
-          <a:prstGeom prst="straightConnector1">
-            <a:avLst/>
-          </a:prstGeom>
-          <a:ln w="38100">
-            <a:solidFill>
-              <a:schemeClr val="tx1"/>
-            </a:solidFill>
-            <a:tailEnd type="triangle"/>
-          </a:ln>
-        </p:spPr>
-        <p:style>
-          <a:lnRef idx="2">
-            <a:schemeClr val="accent1"/>
-          </a:lnRef>
-          <a:fillRef idx="0">
-            <a:schemeClr val="accent1"/>
-          </a:fillRef>
-          <a:effectRef idx="1">
-            <a:schemeClr val="accent1"/>
-          </a:effectRef>
-          <a:fontRef idx="minor">
-            <a:schemeClr val="tx1"/>
-          </a:fontRef>
-        </p:style>
-      </p:cxnSp>
       <p:grpSp>
         <p:nvGrpSpPr>
-          <p:cNvPr id="27" name="Group 26">
-            <a:extLst>
-              <a:ext uri="{FF2B5EF4-FFF2-40B4-BE49-F238E27FC236}">
-                <a16:creationId xmlns:a16="http://schemas.microsoft.com/office/drawing/2014/main" id="{47CB9D10-95D1-7E79-A409-B2F296E36BDF}"/>
+          <p:cNvPr id="7" name="Group 6">
+            <a:extLst>
+              <a:ext uri="{FF2B5EF4-FFF2-40B4-BE49-F238E27FC236}">
+                <a16:creationId xmlns:a16="http://schemas.microsoft.com/office/drawing/2014/main" id="{7531A388-FCF1-F542-583A-B9047A267F0C}"/>
               </a:ext>
             </a:extLst>
           </p:cNvPr>
@@ -5860,18 +6183,316 @@
         </p:nvGrpSpPr>
         <p:grpSpPr>
           <a:xfrm>
-            <a:off x="3281475" y="4840941"/>
-            <a:ext cx="5056094" cy="636494"/>
-            <a:chOff x="3249968" y="4840941"/>
-            <a:chExt cx="5056094" cy="636494"/>
+            <a:off x="3281475" y="3272117"/>
+            <a:ext cx="5453354" cy="2205318"/>
+            <a:chOff x="3281475" y="3272117"/>
+            <a:chExt cx="5453354" cy="2205318"/>
           </a:xfrm>
         </p:grpSpPr>
+        <p:sp>
+          <p:nvSpPr>
+            <p:cNvPr id="3" name="Can 2">
+              <a:extLst>
+                <a:ext uri="{FF2B5EF4-FFF2-40B4-BE49-F238E27FC236}">
+                  <a16:creationId xmlns:a16="http://schemas.microsoft.com/office/drawing/2014/main" id="{3DAB23B9-C289-756E-8828-116099F924B7}"/>
+                </a:ext>
+              </a:extLst>
+            </p:cNvPr>
+            <p:cNvSpPr/>
+            <p:nvPr/>
+          </p:nvSpPr>
+          <p:spPr>
+            <a:xfrm rot="2900441">
+              <a:off x="7563151" y="2595105"/>
+              <a:ext cx="356851" cy="1986504"/>
+            </a:xfrm>
+            <a:prstGeom prst="can">
+              <a:avLst/>
+            </a:prstGeom>
+            <a:solidFill>
+              <a:schemeClr val="accent3">
+                <a:lumMod val="50000"/>
+              </a:schemeClr>
+            </a:solidFill>
+          </p:spPr>
+          <p:style>
+            <a:lnRef idx="2">
+              <a:schemeClr val="accent1">
+                <a:shade val="15000"/>
+              </a:schemeClr>
+            </a:lnRef>
+            <a:fillRef idx="1">
+              <a:schemeClr val="accent1"/>
+            </a:fillRef>
+            <a:effectRef idx="0">
+              <a:schemeClr val="accent1"/>
+            </a:effectRef>
+            <a:fontRef idx="minor">
+              <a:schemeClr val="lt1"/>
+            </a:fontRef>
+          </p:style>
+          <p:txBody>
+            <a:bodyPr rtlCol="0" anchor="ctr"/>
+            <a:lstStyle/>
+            <a:p>
+              <a:pPr algn="ctr"/>
+              <a:endParaRPr lang="en-GB"/>
+            </a:p>
+          </p:txBody>
+        </p:sp>
+        <p:sp>
+          <p:nvSpPr>
+            <p:cNvPr id="4" name="Oval 3">
+              <a:extLst>
+                <a:ext uri="{FF2B5EF4-FFF2-40B4-BE49-F238E27FC236}">
+                  <a16:creationId xmlns:a16="http://schemas.microsoft.com/office/drawing/2014/main" id="{1DF91532-1A43-08CD-FDFC-4460AD705EAB}"/>
+                </a:ext>
+              </a:extLst>
+            </p:cNvPr>
+            <p:cNvSpPr/>
+            <p:nvPr/>
+          </p:nvSpPr>
+          <p:spPr>
+            <a:xfrm>
+              <a:off x="3747454" y="3414356"/>
+              <a:ext cx="348009" cy="348009"/>
+            </a:xfrm>
+            <a:prstGeom prst="ellipse">
+              <a:avLst/>
+            </a:prstGeom>
+            <a:solidFill>
+              <a:srgbClr val="6E8671"/>
+            </a:solidFill>
+          </p:spPr>
+          <p:style>
+            <a:lnRef idx="2">
+              <a:schemeClr val="accent1">
+                <a:shade val="15000"/>
+              </a:schemeClr>
+            </a:lnRef>
+            <a:fillRef idx="1">
+              <a:schemeClr val="accent1"/>
+            </a:fillRef>
+            <a:effectRef idx="0">
+              <a:schemeClr val="accent1"/>
+            </a:effectRef>
+            <a:fontRef idx="minor">
+              <a:schemeClr val="lt1"/>
+            </a:fontRef>
+          </p:style>
+          <p:txBody>
+            <a:bodyPr rtlCol="0" anchor="ctr"/>
+            <a:lstStyle/>
+            <a:p>
+              <a:pPr algn="ctr"/>
+              <a:endParaRPr lang="en-GB"/>
+            </a:p>
+          </p:txBody>
+        </p:sp>
+        <p:sp>
+          <p:nvSpPr>
+            <p:cNvPr id="6" name="Can 5">
+              <a:extLst>
+                <a:ext uri="{FF2B5EF4-FFF2-40B4-BE49-F238E27FC236}">
+                  <a16:creationId xmlns:a16="http://schemas.microsoft.com/office/drawing/2014/main" id="{95586217-3ED9-6C08-C92F-107453677F3D}"/>
+                </a:ext>
+              </a:extLst>
+            </p:cNvPr>
+            <p:cNvSpPr/>
+            <p:nvPr/>
+          </p:nvSpPr>
+          <p:spPr>
+            <a:xfrm rot="2900441">
+              <a:off x="5407919" y="3064930"/>
+              <a:ext cx="356851" cy="1046851"/>
+            </a:xfrm>
+            <a:prstGeom prst="can">
+              <a:avLst/>
+            </a:prstGeom>
+            <a:solidFill>
+              <a:schemeClr val="accent3">
+                <a:lumMod val="50000"/>
+              </a:schemeClr>
+            </a:solidFill>
+          </p:spPr>
+          <p:style>
+            <a:lnRef idx="2">
+              <a:schemeClr val="accent1">
+                <a:shade val="15000"/>
+              </a:schemeClr>
+            </a:lnRef>
+            <a:fillRef idx="1">
+              <a:schemeClr val="accent1"/>
+            </a:fillRef>
+            <a:effectRef idx="0">
+              <a:schemeClr val="accent1"/>
+            </a:effectRef>
+            <a:fontRef idx="minor">
+              <a:schemeClr val="lt1"/>
+            </a:fontRef>
+          </p:style>
+          <p:txBody>
+            <a:bodyPr rtlCol="0" anchor="ctr"/>
+            <a:lstStyle/>
+            <a:p>
+              <a:pPr algn="ctr"/>
+              <a:endParaRPr lang="en-GB"/>
+            </a:p>
+          </p:txBody>
+        </p:sp>
+        <p:sp>
+          <p:nvSpPr>
+            <p:cNvPr id="9" name="Oval 8">
+              <a:extLst>
+                <a:ext uri="{FF2B5EF4-FFF2-40B4-BE49-F238E27FC236}">
+                  <a16:creationId xmlns:a16="http://schemas.microsoft.com/office/drawing/2014/main" id="{C3960152-F5D0-BE75-7D73-2AD6F9403A61}"/>
+                </a:ext>
+              </a:extLst>
+            </p:cNvPr>
+            <p:cNvSpPr/>
+            <p:nvPr/>
+          </p:nvSpPr>
+          <p:spPr>
+            <a:xfrm>
+              <a:off x="3747453" y="4978697"/>
+              <a:ext cx="348009" cy="348009"/>
+            </a:xfrm>
+            <a:prstGeom prst="ellipse">
+              <a:avLst/>
+            </a:prstGeom>
+            <a:solidFill>
+              <a:srgbClr val="6E8671"/>
+            </a:solidFill>
+          </p:spPr>
+          <p:style>
+            <a:lnRef idx="2">
+              <a:schemeClr val="accent1">
+                <a:shade val="15000"/>
+              </a:schemeClr>
+            </a:lnRef>
+            <a:fillRef idx="1">
+              <a:schemeClr val="accent1"/>
+            </a:fillRef>
+            <a:effectRef idx="0">
+              <a:schemeClr val="accent1"/>
+            </a:effectRef>
+            <a:fontRef idx="minor">
+              <a:schemeClr val="lt1"/>
+            </a:fontRef>
+          </p:style>
+          <p:txBody>
+            <a:bodyPr rtlCol="0" anchor="ctr"/>
+            <a:lstStyle/>
+            <a:p>
+              <a:pPr algn="ctr"/>
+              <a:endParaRPr lang="en-GB"/>
+            </a:p>
+          </p:txBody>
+        </p:sp>
+        <p:sp>
+          <p:nvSpPr>
+            <p:cNvPr id="10" name="Oval 9">
+              <a:extLst>
+                <a:ext uri="{FF2B5EF4-FFF2-40B4-BE49-F238E27FC236}">
+                  <a16:creationId xmlns:a16="http://schemas.microsoft.com/office/drawing/2014/main" id="{FA5CE578-F6D5-D870-65B2-7697F5B12839}"/>
+                </a:ext>
+              </a:extLst>
+            </p:cNvPr>
+            <p:cNvSpPr/>
+            <p:nvPr/>
+          </p:nvSpPr>
+          <p:spPr>
+            <a:xfrm>
+              <a:off x="5412339" y="4978696"/>
+              <a:ext cx="348009" cy="348009"/>
+            </a:xfrm>
+            <a:prstGeom prst="ellipse">
+              <a:avLst/>
+            </a:prstGeom>
+            <a:solidFill>
+              <a:srgbClr val="6E8671"/>
+            </a:solidFill>
+          </p:spPr>
+          <p:style>
+            <a:lnRef idx="2">
+              <a:schemeClr val="accent1">
+                <a:shade val="15000"/>
+              </a:schemeClr>
+            </a:lnRef>
+            <a:fillRef idx="1">
+              <a:schemeClr val="accent1"/>
+            </a:fillRef>
+            <a:effectRef idx="0">
+              <a:schemeClr val="accent1"/>
+            </a:effectRef>
+            <a:fontRef idx="minor">
+              <a:schemeClr val="lt1"/>
+            </a:fontRef>
+          </p:style>
+          <p:txBody>
+            <a:bodyPr rtlCol="0" anchor="ctr"/>
+            <a:lstStyle/>
+            <a:p>
+              <a:pPr algn="ctr"/>
+              <a:endParaRPr lang="en-GB"/>
+            </a:p>
+          </p:txBody>
+        </p:sp>
+        <p:sp>
+          <p:nvSpPr>
+            <p:cNvPr id="11" name="Oval 10">
+              <a:extLst>
+                <a:ext uri="{FF2B5EF4-FFF2-40B4-BE49-F238E27FC236}">
+                  <a16:creationId xmlns:a16="http://schemas.microsoft.com/office/drawing/2014/main" id="{6119C1A7-4E86-AC45-4FCF-1113C18CFC60}"/>
+                </a:ext>
+              </a:extLst>
+            </p:cNvPr>
+            <p:cNvSpPr/>
+            <p:nvPr/>
+          </p:nvSpPr>
+          <p:spPr>
+            <a:xfrm>
+              <a:off x="7567571" y="4978696"/>
+              <a:ext cx="348009" cy="348009"/>
+            </a:xfrm>
+            <a:prstGeom prst="ellipse">
+              <a:avLst/>
+            </a:prstGeom>
+            <a:solidFill>
+              <a:srgbClr val="6E8671"/>
+            </a:solidFill>
+          </p:spPr>
+          <p:style>
+            <a:lnRef idx="2">
+              <a:schemeClr val="accent1">
+                <a:shade val="15000"/>
+              </a:schemeClr>
+            </a:lnRef>
+            <a:fillRef idx="1">
+              <a:schemeClr val="accent1"/>
+            </a:fillRef>
+            <a:effectRef idx="0">
+              <a:schemeClr val="accent1"/>
+            </a:effectRef>
+            <a:fontRef idx="minor">
+              <a:schemeClr val="lt1"/>
+            </a:fontRef>
+          </p:style>
+          <p:txBody>
+            <a:bodyPr rtlCol="0" anchor="ctr"/>
+            <a:lstStyle/>
+            <a:p>
+              <a:pPr algn="ctr"/>
+              <a:endParaRPr lang="en-GB"/>
+            </a:p>
+          </p:txBody>
+        </p:sp>
         <p:cxnSp>
           <p:nvCxnSpPr>
-            <p:cNvPr id="8" name="Straight Connector 7">
+            <p:cNvPr id="13" name="Straight Arrow Connector 12">
               <a:extLst>
                 <a:ext uri="{FF2B5EF4-FFF2-40B4-BE49-F238E27FC236}">
-                  <a16:creationId xmlns:a16="http://schemas.microsoft.com/office/drawing/2014/main" id="{432CCEC1-91DC-1D10-EE6C-37F6887AAC7F}"/>
+                  <a16:creationId xmlns:a16="http://schemas.microsoft.com/office/drawing/2014/main" id="{2D3DBCC2-AA03-399F-E0E7-2667ADD80386}"/>
                 </a:ext>
               </a:extLst>
             </p:cNvPr>
@@ -5882,25 +6503,28 @@
           </p:nvCxnSpPr>
           <p:spPr>
             <a:xfrm>
-              <a:off x="3249968" y="4840941"/>
-              <a:ext cx="5056094" cy="0"/>
+              <a:off x="4331710" y="3588355"/>
+              <a:ext cx="499404" cy="0"/>
             </a:xfrm>
-            <a:prstGeom prst="line">
+            <a:prstGeom prst="straightConnector1">
               <a:avLst/>
             </a:prstGeom>
-            <a:ln w="25400">
-              <a:prstDash val="dash"/>
+            <a:ln w="38100">
+              <a:solidFill>
+                <a:schemeClr val="tx1"/>
+              </a:solidFill>
+              <a:tailEnd type="triangle"/>
             </a:ln>
           </p:spPr>
           <p:style>
             <a:lnRef idx="2">
-              <a:schemeClr val="dk1"/>
+              <a:schemeClr val="accent1"/>
             </a:lnRef>
             <a:fillRef idx="0">
-              <a:schemeClr val="dk1"/>
+              <a:schemeClr val="accent1"/>
             </a:fillRef>
             <a:effectRef idx="1">
-              <a:schemeClr val="dk1"/>
+              <a:schemeClr val="accent1"/>
             </a:effectRef>
             <a:fontRef idx="minor">
               <a:schemeClr val="tx1"/>
@@ -5909,10 +6533,10 @@
         </p:cxnSp>
         <p:cxnSp>
           <p:nvCxnSpPr>
-            <p:cNvPr id="12" name="Straight Connector 11">
+            <p:cNvPr id="15" name="Straight Arrow Connector 14">
               <a:extLst>
                 <a:ext uri="{FF2B5EF4-FFF2-40B4-BE49-F238E27FC236}">
-                  <a16:creationId xmlns:a16="http://schemas.microsoft.com/office/drawing/2014/main" id="{B8602331-A44B-8C68-BC87-977DBB6BED00}"/>
+                  <a16:creationId xmlns:a16="http://schemas.microsoft.com/office/drawing/2014/main" id="{44EF35F8-87E6-40F1-B29C-695AB7BE1D1B}"/>
                 </a:ext>
               </a:extLst>
             </p:cNvPr>
@@ -5923,25 +6547,28 @@
           </p:nvCxnSpPr>
           <p:spPr>
             <a:xfrm>
-              <a:off x="3249968" y="5159188"/>
-              <a:ext cx="5056094" cy="0"/>
+              <a:off x="6381504" y="3588355"/>
+              <a:ext cx="499404" cy="0"/>
             </a:xfrm>
-            <a:prstGeom prst="line">
+            <a:prstGeom prst="straightConnector1">
               <a:avLst/>
             </a:prstGeom>
-            <a:ln w="25400">
-              <a:prstDash val="dash"/>
+            <a:ln w="38100">
+              <a:solidFill>
+                <a:schemeClr val="tx1"/>
+              </a:solidFill>
+              <a:tailEnd type="triangle"/>
             </a:ln>
           </p:spPr>
           <p:style>
             <a:lnRef idx="2">
-              <a:schemeClr val="dk1"/>
+              <a:schemeClr val="accent1"/>
             </a:lnRef>
             <a:fillRef idx="0">
-              <a:schemeClr val="dk1"/>
+              <a:schemeClr val="accent1"/>
             </a:fillRef>
             <a:effectRef idx="1">
-              <a:schemeClr val="dk1"/>
+              <a:schemeClr val="accent1"/>
             </a:effectRef>
             <a:fontRef idx="minor">
               <a:schemeClr val="tx1"/>
@@ -5950,10 +6577,10 @@
         </p:cxnSp>
         <p:cxnSp>
           <p:nvCxnSpPr>
-            <p:cNvPr id="14" name="Straight Connector 13">
+            <p:cNvPr id="16" name="Straight Arrow Connector 15">
               <a:extLst>
                 <a:ext uri="{FF2B5EF4-FFF2-40B4-BE49-F238E27FC236}">
-                  <a16:creationId xmlns:a16="http://schemas.microsoft.com/office/drawing/2014/main" id="{958C3606-44CC-3291-025D-A1CD80B6B1AC}"/>
+                  <a16:creationId xmlns:a16="http://schemas.microsoft.com/office/drawing/2014/main" id="{C3D33A4D-9FEE-681F-E292-E65AC2D374EA}"/>
                 </a:ext>
               </a:extLst>
             </p:cNvPr>
@@ -5964,58 +6591,40 @@
           </p:nvCxnSpPr>
           <p:spPr>
             <a:xfrm>
-              <a:off x="3249968" y="5477435"/>
-              <a:ext cx="5056094" cy="0"/>
+              <a:off x="4331710" y="5152700"/>
+              <a:ext cx="499404" cy="0"/>
             </a:xfrm>
-            <a:prstGeom prst="line">
+            <a:prstGeom prst="straightConnector1">
               <a:avLst/>
             </a:prstGeom>
-            <a:ln w="25400">
-              <a:prstDash val="dash"/>
+            <a:ln w="38100">
+              <a:solidFill>
+                <a:schemeClr val="tx1"/>
+              </a:solidFill>
+              <a:tailEnd type="triangle"/>
             </a:ln>
           </p:spPr>
           <p:style>
             <a:lnRef idx="2">
-              <a:schemeClr val="dk1"/>
+              <a:schemeClr val="accent1"/>
             </a:lnRef>
             <a:fillRef idx="0">
-              <a:schemeClr val="dk1"/>
+              <a:schemeClr val="accent1"/>
             </a:fillRef>
             <a:effectRef idx="1">
-              <a:schemeClr val="dk1"/>
+              <a:schemeClr val="accent1"/>
             </a:effectRef>
             <a:fontRef idx="minor">
               <a:schemeClr val="tx1"/>
             </a:fontRef>
           </p:style>
         </p:cxnSp>
-      </p:grpSp>
-      <p:grpSp>
-        <p:nvGrpSpPr>
-          <p:cNvPr id="26" name="Group 25">
-            <a:extLst>
-              <a:ext uri="{FF2B5EF4-FFF2-40B4-BE49-F238E27FC236}">
-                <a16:creationId xmlns:a16="http://schemas.microsoft.com/office/drawing/2014/main" id="{F71348C1-4628-5DAD-FA7E-6B71919EB319}"/>
-              </a:ext>
-            </a:extLst>
-          </p:cNvPr>
-          <p:cNvGrpSpPr/>
-          <p:nvPr/>
-        </p:nvGrpSpPr>
-        <p:grpSpPr>
-          <a:xfrm>
-            <a:off x="3281475" y="3272117"/>
-            <a:ext cx="5056094" cy="636494"/>
-            <a:chOff x="3232301" y="3272117"/>
-            <a:chExt cx="5056094" cy="636494"/>
-          </a:xfrm>
-        </p:grpSpPr>
         <p:cxnSp>
           <p:nvCxnSpPr>
-            <p:cNvPr id="23" name="Straight Connector 22">
+            <p:cNvPr id="17" name="Straight Arrow Connector 16">
               <a:extLst>
                 <a:ext uri="{FF2B5EF4-FFF2-40B4-BE49-F238E27FC236}">
-                  <a16:creationId xmlns:a16="http://schemas.microsoft.com/office/drawing/2014/main" id="{941ED134-FF55-0A8C-FB86-481CBDFBDE0C}"/>
+                  <a16:creationId xmlns:a16="http://schemas.microsoft.com/office/drawing/2014/main" id="{D2F1987E-D891-D8FF-9545-BE54719A1221}"/>
                 </a:ext>
               </a:extLst>
             </p:cNvPr>
@@ -6026,113 +6635,322 @@
           </p:nvCxnSpPr>
           <p:spPr>
             <a:xfrm>
-              <a:off x="3232301" y="3272117"/>
-              <a:ext cx="5056094" cy="0"/>
+              <a:off x="6381504" y="5152700"/>
+              <a:ext cx="499404" cy="0"/>
             </a:xfrm>
-            <a:prstGeom prst="line">
+            <a:prstGeom prst="straightConnector1">
               <a:avLst/>
             </a:prstGeom>
-            <a:ln w="25400">
-              <a:prstDash val="dash"/>
+            <a:ln w="38100">
+              <a:solidFill>
+                <a:schemeClr val="tx1"/>
+              </a:solidFill>
+              <a:tailEnd type="triangle"/>
             </a:ln>
           </p:spPr>
           <p:style>
             <a:lnRef idx="2">
-              <a:schemeClr val="dk1"/>
+              <a:schemeClr val="accent1"/>
             </a:lnRef>
             <a:fillRef idx="0">
-              <a:schemeClr val="dk1"/>
+              <a:schemeClr val="accent1"/>
             </a:fillRef>
             <a:effectRef idx="1">
-              <a:schemeClr val="dk1"/>
+              <a:schemeClr val="accent1"/>
             </a:effectRef>
             <a:fontRef idx="minor">
               <a:schemeClr val="tx1"/>
             </a:fontRef>
           </p:style>
         </p:cxnSp>
-        <p:cxnSp>
-          <p:nvCxnSpPr>
-            <p:cNvPr id="24" name="Straight Connector 23">
+        <p:grpSp>
+          <p:nvGrpSpPr>
+            <p:cNvPr id="27" name="Group 26">
               <a:extLst>
                 <a:ext uri="{FF2B5EF4-FFF2-40B4-BE49-F238E27FC236}">
-                  <a16:creationId xmlns:a16="http://schemas.microsoft.com/office/drawing/2014/main" id="{8B65DEE9-73D4-5FF1-1B20-D88AD4C84319}"/>
+                  <a16:creationId xmlns:a16="http://schemas.microsoft.com/office/drawing/2014/main" id="{47CB9D10-95D1-7E79-A409-B2F296E36BDF}"/>
                 </a:ext>
               </a:extLst>
             </p:cNvPr>
-            <p:cNvCxnSpPr>
-              <a:cxnSpLocks/>
-            </p:cNvCxnSpPr>
+            <p:cNvGrpSpPr/>
             <p:nvPr/>
-          </p:nvCxnSpPr>
-          <p:spPr>
+          </p:nvGrpSpPr>
+          <p:grpSpPr>
             <a:xfrm>
-              <a:off x="3232301" y="3590364"/>
-              <a:ext cx="5056094" cy="0"/>
+              <a:off x="3281475" y="4840941"/>
+              <a:ext cx="5056094" cy="636494"/>
+              <a:chOff x="3249968" y="4840941"/>
+              <a:chExt cx="5056094" cy="636494"/>
             </a:xfrm>
-            <a:prstGeom prst="line">
-              <a:avLst/>
-            </a:prstGeom>
-            <a:ln w="25400">
-              <a:prstDash val="dash"/>
-            </a:ln>
-          </p:spPr>
-          <p:style>
-            <a:lnRef idx="2">
-              <a:schemeClr val="dk1"/>
-            </a:lnRef>
-            <a:fillRef idx="0">
-              <a:schemeClr val="dk1"/>
-            </a:fillRef>
-            <a:effectRef idx="1">
-              <a:schemeClr val="dk1"/>
-            </a:effectRef>
-            <a:fontRef idx="minor">
-              <a:schemeClr val="tx1"/>
-            </a:fontRef>
-          </p:style>
-        </p:cxnSp>
-        <p:cxnSp>
-          <p:nvCxnSpPr>
-            <p:cNvPr id="25" name="Straight Connector 24">
+          </p:grpSpPr>
+          <p:cxnSp>
+            <p:nvCxnSpPr>
+              <p:cNvPr id="8" name="Straight Connector 7">
+                <a:extLst>
+                  <a:ext uri="{FF2B5EF4-FFF2-40B4-BE49-F238E27FC236}">
+                    <a16:creationId xmlns:a16="http://schemas.microsoft.com/office/drawing/2014/main" id="{432CCEC1-91DC-1D10-EE6C-37F6887AAC7F}"/>
+                  </a:ext>
+                </a:extLst>
+              </p:cNvPr>
+              <p:cNvCxnSpPr>
+                <a:cxnSpLocks/>
+              </p:cNvCxnSpPr>
+              <p:nvPr/>
+            </p:nvCxnSpPr>
+            <p:spPr>
+              <a:xfrm>
+                <a:off x="3249968" y="4840941"/>
+                <a:ext cx="5056094" cy="0"/>
+              </a:xfrm>
+              <a:prstGeom prst="line">
+                <a:avLst/>
+              </a:prstGeom>
+              <a:ln w="25400">
+                <a:prstDash val="dash"/>
+              </a:ln>
+            </p:spPr>
+            <p:style>
+              <a:lnRef idx="2">
+                <a:schemeClr val="dk1"/>
+              </a:lnRef>
+              <a:fillRef idx="0">
+                <a:schemeClr val="dk1"/>
+              </a:fillRef>
+              <a:effectRef idx="1">
+                <a:schemeClr val="dk1"/>
+              </a:effectRef>
+              <a:fontRef idx="minor">
+                <a:schemeClr val="tx1"/>
+              </a:fontRef>
+            </p:style>
+          </p:cxnSp>
+          <p:cxnSp>
+            <p:nvCxnSpPr>
+              <p:cNvPr id="12" name="Straight Connector 11">
+                <a:extLst>
+                  <a:ext uri="{FF2B5EF4-FFF2-40B4-BE49-F238E27FC236}">
+                    <a16:creationId xmlns:a16="http://schemas.microsoft.com/office/drawing/2014/main" id="{B8602331-A44B-8C68-BC87-977DBB6BED00}"/>
+                  </a:ext>
+                </a:extLst>
+              </p:cNvPr>
+              <p:cNvCxnSpPr>
+                <a:cxnSpLocks/>
+              </p:cNvCxnSpPr>
+              <p:nvPr/>
+            </p:nvCxnSpPr>
+            <p:spPr>
+              <a:xfrm>
+                <a:off x="3249968" y="5159188"/>
+                <a:ext cx="5056094" cy="0"/>
+              </a:xfrm>
+              <a:prstGeom prst="line">
+                <a:avLst/>
+              </a:prstGeom>
+              <a:ln w="25400">
+                <a:prstDash val="dash"/>
+              </a:ln>
+            </p:spPr>
+            <p:style>
+              <a:lnRef idx="2">
+                <a:schemeClr val="dk1"/>
+              </a:lnRef>
+              <a:fillRef idx="0">
+                <a:schemeClr val="dk1"/>
+              </a:fillRef>
+              <a:effectRef idx="1">
+                <a:schemeClr val="dk1"/>
+              </a:effectRef>
+              <a:fontRef idx="minor">
+                <a:schemeClr val="tx1"/>
+              </a:fontRef>
+            </p:style>
+          </p:cxnSp>
+          <p:cxnSp>
+            <p:nvCxnSpPr>
+              <p:cNvPr id="14" name="Straight Connector 13">
+                <a:extLst>
+                  <a:ext uri="{FF2B5EF4-FFF2-40B4-BE49-F238E27FC236}">
+                    <a16:creationId xmlns:a16="http://schemas.microsoft.com/office/drawing/2014/main" id="{958C3606-44CC-3291-025D-A1CD80B6B1AC}"/>
+                  </a:ext>
+                </a:extLst>
+              </p:cNvPr>
+              <p:cNvCxnSpPr>
+                <a:cxnSpLocks/>
+              </p:cNvCxnSpPr>
+              <p:nvPr/>
+            </p:nvCxnSpPr>
+            <p:spPr>
+              <a:xfrm>
+                <a:off x="3249968" y="5477435"/>
+                <a:ext cx="5056094" cy="0"/>
+              </a:xfrm>
+              <a:prstGeom prst="line">
+                <a:avLst/>
+              </a:prstGeom>
+              <a:ln w="25400">
+                <a:prstDash val="dash"/>
+              </a:ln>
+            </p:spPr>
+            <p:style>
+              <a:lnRef idx="2">
+                <a:schemeClr val="dk1"/>
+              </a:lnRef>
+              <a:fillRef idx="0">
+                <a:schemeClr val="dk1"/>
+              </a:fillRef>
+              <a:effectRef idx="1">
+                <a:schemeClr val="dk1"/>
+              </a:effectRef>
+              <a:fontRef idx="minor">
+                <a:schemeClr val="tx1"/>
+              </a:fontRef>
+            </p:style>
+          </p:cxnSp>
+        </p:grpSp>
+        <p:grpSp>
+          <p:nvGrpSpPr>
+            <p:cNvPr id="26" name="Group 25">
               <a:extLst>
                 <a:ext uri="{FF2B5EF4-FFF2-40B4-BE49-F238E27FC236}">
-                  <a16:creationId xmlns:a16="http://schemas.microsoft.com/office/drawing/2014/main" id="{90C83916-2959-BF71-A7DF-78B6DCF84620}"/>
+                  <a16:creationId xmlns:a16="http://schemas.microsoft.com/office/drawing/2014/main" id="{F71348C1-4628-5DAD-FA7E-6B71919EB319}"/>
                 </a:ext>
               </a:extLst>
             </p:cNvPr>
-            <p:cNvCxnSpPr>
-              <a:cxnSpLocks/>
-            </p:cNvCxnSpPr>
+            <p:cNvGrpSpPr/>
             <p:nvPr/>
-          </p:nvCxnSpPr>
-          <p:spPr>
+          </p:nvGrpSpPr>
+          <p:grpSpPr>
             <a:xfrm>
-              <a:off x="3232301" y="3908611"/>
-              <a:ext cx="5056094" cy="0"/>
+              <a:off x="3281475" y="3272117"/>
+              <a:ext cx="5056094" cy="636494"/>
+              <a:chOff x="3232301" y="3272117"/>
+              <a:chExt cx="5056094" cy="636494"/>
             </a:xfrm>
-            <a:prstGeom prst="line">
-              <a:avLst/>
-            </a:prstGeom>
-            <a:ln w="25400">
-              <a:prstDash val="dash"/>
-            </a:ln>
-          </p:spPr>
-          <p:style>
-            <a:lnRef idx="2">
-              <a:schemeClr val="dk1"/>
-            </a:lnRef>
-            <a:fillRef idx="0">
-              <a:schemeClr val="dk1"/>
-            </a:fillRef>
-            <a:effectRef idx="1">
-              <a:schemeClr val="dk1"/>
-            </a:effectRef>
-            <a:fontRef idx="minor">
-              <a:schemeClr val="tx1"/>
-            </a:fontRef>
-          </p:style>
-        </p:cxnSp>
+          </p:grpSpPr>
+          <p:cxnSp>
+            <p:nvCxnSpPr>
+              <p:cNvPr id="23" name="Straight Connector 22">
+                <a:extLst>
+                  <a:ext uri="{FF2B5EF4-FFF2-40B4-BE49-F238E27FC236}">
+                    <a16:creationId xmlns:a16="http://schemas.microsoft.com/office/drawing/2014/main" id="{941ED134-FF55-0A8C-FB86-481CBDFBDE0C}"/>
+                  </a:ext>
+                </a:extLst>
+              </p:cNvPr>
+              <p:cNvCxnSpPr>
+                <a:cxnSpLocks/>
+              </p:cNvCxnSpPr>
+              <p:nvPr/>
+            </p:nvCxnSpPr>
+            <p:spPr>
+              <a:xfrm>
+                <a:off x="3232301" y="3272117"/>
+                <a:ext cx="5056094" cy="0"/>
+              </a:xfrm>
+              <a:prstGeom prst="line">
+                <a:avLst/>
+              </a:prstGeom>
+              <a:ln w="25400">
+                <a:prstDash val="dash"/>
+              </a:ln>
+            </p:spPr>
+            <p:style>
+              <a:lnRef idx="2">
+                <a:schemeClr val="dk1"/>
+              </a:lnRef>
+              <a:fillRef idx="0">
+                <a:schemeClr val="dk1"/>
+              </a:fillRef>
+              <a:effectRef idx="1">
+                <a:schemeClr val="dk1"/>
+              </a:effectRef>
+              <a:fontRef idx="minor">
+                <a:schemeClr val="tx1"/>
+              </a:fontRef>
+            </p:style>
+          </p:cxnSp>
+          <p:cxnSp>
+            <p:nvCxnSpPr>
+              <p:cNvPr id="24" name="Straight Connector 23">
+                <a:extLst>
+                  <a:ext uri="{FF2B5EF4-FFF2-40B4-BE49-F238E27FC236}">
+                    <a16:creationId xmlns:a16="http://schemas.microsoft.com/office/drawing/2014/main" id="{8B65DEE9-73D4-5FF1-1B20-D88AD4C84319}"/>
+                  </a:ext>
+                </a:extLst>
+              </p:cNvPr>
+              <p:cNvCxnSpPr>
+                <a:cxnSpLocks/>
+              </p:cNvCxnSpPr>
+              <p:nvPr/>
+            </p:nvCxnSpPr>
+            <p:spPr>
+              <a:xfrm>
+                <a:off x="3232301" y="3590364"/>
+                <a:ext cx="5056094" cy="0"/>
+              </a:xfrm>
+              <a:prstGeom prst="line">
+                <a:avLst/>
+              </a:prstGeom>
+              <a:ln w="25400">
+                <a:prstDash val="dash"/>
+              </a:ln>
+            </p:spPr>
+            <p:style>
+              <a:lnRef idx="2">
+                <a:schemeClr val="dk1"/>
+              </a:lnRef>
+              <a:fillRef idx="0">
+                <a:schemeClr val="dk1"/>
+              </a:fillRef>
+              <a:effectRef idx="1">
+                <a:schemeClr val="dk1"/>
+              </a:effectRef>
+              <a:fontRef idx="minor">
+                <a:schemeClr val="tx1"/>
+              </a:fontRef>
+            </p:style>
+          </p:cxnSp>
+          <p:cxnSp>
+            <p:nvCxnSpPr>
+              <p:cNvPr id="25" name="Straight Connector 24">
+                <a:extLst>
+                  <a:ext uri="{FF2B5EF4-FFF2-40B4-BE49-F238E27FC236}">
+                    <a16:creationId xmlns:a16="http://schemas.microsoft.com/office/drawing/2014/main" id="{90C83916-2959-BF71-A7DF-78B6DCF84620}"/>
+                  </a:ext>
+                </a:extLst>
+              </p:cNvPr>
+              <p:cNvCxnSpPr>
+                <a:cxnSpLocks/>
+              </p:cNvCxnSpPr>
+              <p:nvPr/>
+            </p:nvCxnSpPr>
+            <p:spPr>
+              <a:xfrm>
+                <a:off x="3232301" y="3908611"/>
+                <a:ext cx="5056094" cy="0"/>
+              </a:xfrm>
+              <a:prstGeom prst="line">
+                <a:avLst/>
+              </a:prstGeom>
+              <a:ln w="25400">
+                <a:prstDash val="dash"/>
+              </a:ln>
+            </p:spPr>
+            <p:style>
+              <a:lnRef idx="2">
+                <a:schemeClr val="dk1"/>
+              </a:lnRef>
+              <a:fillRef idx="0">
+                <a:schemeClr val="dk1"/>
+              </a:fillRef>
+              <a:effectRef idx="1">
+                <a:schemeClr val="dk1"/>
+              </a:effectRef>
+              <a:fontRef idx="minor">
+                <a:schemeClr val="tx1"/>
+              </a:fontRef>
+            </p:style>
+          </p:cxnSp>
+        </p:grpSp>
       </p:grpSp>
     </p:spTree>
     <p:extLst>

--- a/Presentations/Biohack_Presentation.pptx
+++ b/Presentations/Biohack_Presentation.pptx
@@ -5,15 +5,13 @@
     <p:sldMasterId id="2147483648" r:id="rId1"/>
   </p:sldMasterIdLst>
   <p:notesMasterIdLst>
-    <p:notesMasterId r:id="rId8"/>
+    <p:notesMasterId r:id="rId6"/>
   </p:notesMasterIdLst>
   <p:sldIdLst>
     <p:sldId id="256" r:id="rId2"/>
     <p:sldId id="259" r:id="rId3"/>
     <p:sldId id="260" r:id="rId4"/>
     <p:sldId id="263" r:id="rId5"/>
-    <p:sldId id="261" r:id="rId6"/>
-    <p:sldId id="262" r:id="rId7"/>
   </p:sldIdLst>
   <p:sldSz cx="12192000" cy="6858000"/>
   <p:notesSz cx="6858000" cy="9144000"/>
@@ -5498,1473 +5496,6 @@
 </p:sld>
 </file>
 
-<file path=ppt/slides/slide5.xml><?xml version="1.0" encoding="utf-8"?>
-<p:sld xmlns:a="http://schemas.openxmlformats.org/drawingml/2006/main" xmlns:r="http://schemas.openxmlformats.org/officeDocument/2006/relationships" xmlns:p="http://schemas.openxmlformats.org/presentationml/2006/main">
-  <p:cSld>
-    <p:spTree>
-      <p:nvGrpSpPr>
-        <p:cNvPr id="1" name="">
-          <a:extLst>
-            <a:ext uri="{FF2B5EF4-FFF2-40B4-BE49-F238E27FC236}">
-              <a16:creationId xmlns:a16="http://schemas.microsoft.com/office/drawing/2014/main" id="{B0A3BD8C-C7C4-AF5E-AB8F-6D38B2868741}"/>
-            </a:ext>
-          </a:extLst>
-        </p:cNvPr>
-        <p:cNvGrpSpPr/>
-        <p:nvPr/>
-      </p:nvGrpSpPr>
-      <p:grpSpPr>
-        <a:xfrm>
-          <a:off x="0" y="0"/>
-          <a:ext cx="0" cy="0"/>
-          <a:chOff x="0" y="0"/>
-          <a:chExt cx="0" cy="0"/>
-        </a:xfrm>
-      </p:grpSpPr>
-      <p:sp>
-        <p:nvSpPr>
-          <p:cNvPr id="2" name="Title 1">
-            <a:extLst>
-              <a:ext uri="{FF2B5EF4-FFF2-40B4-BE49-F238E27FC236}">
-                <a16:creationId xmlns:a16="http://schemas.microsoft.com/office/drawing/2014/main" id="{5BF1475F-653F-C7B6-F169-7C07EFDA05E4}"/>
-              </a:ext>
-            </a:extLst>
-          </p:cNvPr>
-          <p:cNvSpPr>
-            <a:spLocks noGrp="1"/>
-          </p:cNvSpPr>
-          <p:nvPr>
-            <p:ph type="title"/>
-          </p:nvPr>
-        </p:nvSpPr>
-        <p:spPr/>
-        <p:txBody>
-          <a:bodyPr/>
-          <a:lstStyle/>
-          <a:p>
-            <a:r>
-              <a:rPr lang="en-GB" dirty="0">
-                <a:latin typeface="Arial" panose="020B0604020202020204" pitchFamily="34" charset="0"/>
-                <a:cs typeface="Arial" panose="020B0604020202020204" pitchFamily="34" charset="0"/>
-              </a:rPr>
-              <a:t>Problem</a:t>
-            </a:r>
-          </a:p>
-        </p:txBody>
-      </p:sp>
-      <p:sp>
-        <p:nvSpPr>
-          <p:cNvPr id="5" name="Content Placeholder 4">
-            <a:extLst>
-              <a:ext uri="{FF2B5EF4-FFF2-40B4-BE49-F238E27FC236}">
-                <a16:creationId xmlns:a16="http://schemas.microsoft.com/office/drawing/2014/main" id="{0804122C-1C2C-88CB-A0C0-15844DD70EE7}"/>
-              </a:ext>
-            </a:extLst>
-          </p:cNvPr>
-          <p:cNvSpPr>
-            <a:spLocks noGrp="1"/>
-          </p:cNvSpPr>
-          <p:nvPr>
-            <p:ph idx="1"/>
-          </p:nvPr>
-        </p:nvSpPr>
-        <p:spPr>
-          <a:xfrm>
-            <a:off x="838200" y="1825625"/>
-            <a:ext cx="10515600" cy="969214"/>
-          </a:xfrm>
-        </p:spPr>
-        <p:txBody>
-          <a:bodyPr>
-            <a:normAutofit/>
-          </a:bodyPr>
-          <a:lstStyle/>
-          <a:p>
-            <a:r>
-              <a:rPr lang="en-GB" dirty="0">
-                <a:latin typeface="Arial" panose="020B0604020202020204" pitchFamily="34" charset="0"/>
-                <a:cs typeface="Arial" panose="020B0604020202020204" pitchFamily="34" charset="0"/>
-              </a:rPr>
-              <a:t>Measuring filament growth rate requires disentangling from rotation</a:t>
-            </a:r>
-          </a:p>
-        </p:txBody>
-      </p:sp>
-      <p:sp>
-        <p:nvSpPr>
-          <p:cNvPr id="3" name="Can 2">
-            <a:extLst>
-              <a:ext uri="{FF2B5EF4-FFF2-40B4-BE49-F238E27FC236}">
-                <a16:creationId xmlns:a16="http://schemas.microsoft.com/office/drawing/2014/main" id="{8AE08E5B-5669-09AC-DB18-CC4B4B2F8424}"/>
-              </a:ext>
-            </a:extLst>
-          </p:cNvPr>
-          <p:cNvSpPr/>
-          <p:nvPr/>
-        </p:nvSpPr>
-        <p:spPr>
-          <a:xfrm rot="2900441">
-            <a:off x="7563151" y="2595105"/>
-            <a:ext cx="356851" cy="1986504"/>
-          </a:xfrm>
-          <a:prstGeom prst="can">
-            <a:avLst/>
-          </a:prstGeom>
-          <a:solidFill>
-            <a:schemeClr val="accent3">
-              <a:lumMod val="50000"/>
-            </a:schemeClr>
-          </a:solidFill>
-        </p:spPr>
-        <p:style>
-          <a:lnRef idx="2">
-            <a:schemeClr val="accent1">
-              <a:shade val="15000"/>
-            </a:schemeClr>
-          </a:lnRef>
-          <a:fillRef idx="1">
-            <a:schemeClr val="accent1"/>
-          </a:fillRef>
-          <a:effectRef idx="0">
-            <a:schemeClr val="accent1"/>
-          </a:effectRef>
-          <a:fontRef idx="minor">
-            <a:schemeClr val="lt1"/>
-          </a:fontRef>
-        </p:style>
-        <p:txBody>
-          <a:bodyPr rtlCol="0" anchor="ctr"/>
-          <a:lstStyle/>
-          <a:p>
-            <a:pPr algn="ctr"/>
-            <a:endParaRPr lang="en-GB"/>
-          </a:p>
-        </p:txBody>
-      </p:sp>
-      <p:sp>
-        <p:nvSpPr>
-          <p:cNvPr id="4" name="Oval 3">
-            <a:extLst>
-              <a:ext uri="{FF2B5EF4-FFF2-40B4-BE49-F238E27FC236}">
-                <a16:creationId xmlns:a16="http://schemas.microsoft.com/office/drawing/2014/main" id="{FBB709DF-07E7-E15F-52E9-305DEDC2B2EB}"/>
-              </a:ext>
-            </a:extLst>
-          </p:cNvPr>
-          <p:cNvSpPr/>
-          <p:nvPr/>
-        </p:nvSpPr>
-        <p:spPr>
-          <a:xfrm>
-            <a:off x="3747454" y="3414356"/>
-            <a:ext cx="348009" cy="348009"/>
-          </a:xfrm>
-          <a:prstGeom prst="ellipse">
-            <a:avLst/>
-          </a:prstGeom>
-          <a:solidFill>
-            <a:srgbClr val="6E8671"/>
-          </a:solidFill>
-        </p:spPr>
-        <p:style>
-          <a:lnRef idx="2">
-            <a:schemeClr val="accent1">
-              <a:shade val="15000"/>
-            </a:schemeClr>
-          </a:lnRef>
-          <a:fillRef idx="1">
-            <a:schemeClr val="accent1"/>
-          </a:fillRef>
-          <a:effectRef idx="0">
-            <a:schemeClr val="accent1"/>
-          </a:effectRef>
-          <a:fontRef idx="minor">
-            <a:schemeClr val="lt1"/>
-          </a:fontRef>
-        </p:style>
-        <p:txBody>
-          <a:bodyPr rtlCol="0" anchor="ctr"/>
-          <a:lstStyle/>
-          <a:p>
-            <a:pPr algn="ctr"/>
-            <a:endParaRPr lang="en-GB"/>
-          </a:p>
-        </p:txBody>
-      </p:sp>
-      <p:sp>
-        <p:nvSpPr>
-          <p:cNvPr id="6" name="Can 5">
-            <a:extLst>
-              <a:ext uri="{FF2B5EF4-FFF2-40B4-BE49-F238E27FC236}">
-                <a16:creationId xmlns:a16="http://schemas.microsoft.com/office/drawing/2014/main" id="{99559C54-B695-B938-839E-7F8CDD6C7DCC}"/>
-              </a:ext>
-            </a:extLst>
-          </p:cNvPr>
-          <p:cNvSpPr/>
-          <p:nvPr/>
-        </p:nvSpPr>
-        <p:spPr>
-          <a:xfrm rot="2900441">
-            <a:off x="5407919" y="3064930"/>
-            <a:ext cx="356851" cy="1046851"/>
-          </a:xfrm>
-          <a:prstGeom prst="can">
-            <a:avLst/>
-          </a:prstGeom>
-          <a:solidFill>
-            <a:schemeClr val="accent3">
-              <a:lumMod val="50000"/>
-            </a:schemeClr>
-          </a:solidFill>
-        </p:spPr>
-        <p:style>
-          <a:lnRef idx="2">
-            <a:schemeClr val="accent1">
-              <a:shade val="15000"/>
-            </a:schemeClr>
-          </a:lnRef>
-          <a:fillRef idx="1">
-            <a:schemeClr val="accent1"/>
-          </a:fillRef>
-          <a:effectRef idx="0">
-            <a:schemeClr val="accent1"/>
-          </a:effectRef>
-          <a:fontRef idx="minor">
-            <a:schemeClr val="lt1"/>
-          </a:fontRef>
-        </p:style>
-        <p:txBody>
-          <a:bodyPr rtlCol="0" anchor="ctr"/>
-          <a:lstStyle/>
-          <a:p>
-            <a:pPr algn="ctr"/>
-            <a:endParaRPr lang="en-GB"/>
-          </a:p>
-        </p:txBody>
-      </p:sp>
-      <p:sp>
-        <p:nvSpPr>
-          <p:cNvPr id="9" name="Oval 8">
-            <a:extLst>
-              <a:ext uri="{FF2B5EF4-FFF2-40B4-BE49-F238E27FC236}">
-                <a16:creationId xmlns:a16="http://schemas.microsoft.com/office/drawing/2014/main" id="{BF674036-8A1C-2537-EC34-2CCF37B7FA74}"/>
-              </a:ext>
-            </a:extLst>
-          </p:cNvPr>
-          <p:cNvSpPr/>
-          <p:nvPr/>
-        </p:nvSpPr>
-        <p:spPr>
-          <a:xfrm>
-            <a:off x="3747453" y="4978697"/>
-            <a:ext cx="348009" cy="348009"/>
-          </a:xfrm>
-          <a:prstGeom prst="ellipse">
-            <a:avLst/>
-          </a:prstGeom>
-          <a:solidFill>
-            <a:srgbClr val="6E8671"/>
-          </a:solidFill>
-        </p:spPr>
-        <p:style>
-          <a:lnRef idx="2">
-            <a:schemeClr val="accent1">
-              <a:shade val="15000"/>
-            </a:schemeClr>
-          </a:lnRef>
-          <a:fillRef idx="1">
-            <a:schemeClr val="accent1"/>
-          </a:fillRef>
-          <a:effectRef idx="0">
-            <a:schemeClr val="accent1"/>
-          </a:effectRef>
-          <a:fontRef idx="minor">
-            <a:schemeClr val="lt1"/>
-          </a:fontRef>
-        </p:style>
-        <p:txBody>
-          <a:bodyPr rtlCol="0" anchor="ctr"/>
-          <a:lstStyle/>
-          <a:p>
-            <a:pPr algn="ctr"/>
-            <a:endParaRPr lang="en-GB"/>
-          </a:p>
-        </p:txBody>
-      </p:sp>
-      <p:sp>
-        <p:nvSpPr>
-          <p:cNvPr id="10" name="Oval 9">
-            <a:extLst>
-              <a:ext uri="{FF2B5EF4-FFF2-40B4-BE49-F238E27FC236}">
-                <a16:creationId xmlns:a16="http://schemas.microsoft.com/office/drawing/2014/main" id="{22D9C655-F6DF-28B6-E8DF-72B0EAC97EC6}"/>
-              </a:ext>
-            </a:extLst>
-          </p:cNvPr>
-          <p:cNvSpPr/>
-          <p:nvPr/>
-        </p:nvSpPr>
-        <p:spPr>
-          <a:xfrm>
-            <a:off x="5412339" y="4978696"/>
-            <a:ext cx="348009" cy="348009"/>
-          </a:xfrm>
-          <a:prstGeom prst="ellipse">
-            <a:avLst/>
-          </a:prstGeom>
-          <a:solidFill>
-            <a:srgbClr val="6E8671"/>
-          </a:solidFill>
-        </p:spPr>
-        <p:style>
-          <a:lnRef idx="2">
-            <a:schemeClr val="accent1">
-              <a:shade val="15000"/>
-            </a:schemeClr>
-          </a:lnRef>
-          <a:fillRef idx="1">
-            <a:schemeClr val="accent1"/>
-          </a:fillRef>
-          <a:effectRef idx="0">
-            <a:schemeClr val="accent1"/>
-          </a:effectRef>
-          <a:fontRef idx="minor">
-            <a:schemeClr val="lt1"/>
-          </a:fontRef>
-        </p:style>
-        <p:txBody>
-          <a:bodyPr rtlCol="0" anchor="ctr"/>
-          <a:lstStyle/>
-          <a:p>
-            <a:pPr algn="ctr"/>
-            <a:endParaRPr lang="en-GB"/>
-          </a:p>
-        </p:txBody>
-      </p:sp>
-      <p:sp>
-        <p:nvSpPr>
-          <p:cNvPr id="11" name="Oval 10">
-            <a:extLst>
-              <a:ext uri="{FF2B5EF4-FFF2-40B4-BE49-F238E27FC236}">
-                <a16:creationId xmlns:a16="http://schemas.microsoft.com/office/drawing/2014/main" id="{F33ACC34-5DAD-7058-0E96-EF8672D4CFAB}"/>
-              </a:ext>
-            </a:extLst>
-          </p:cNvPr>
-          <p:cNvSpPr/>
-          <p:nvPr/>
-        </p:nvSpPr>
-        <p:spPr>
-          <a:xfrm>
-            <a:off x="7567571" y="4978696"/>
-            <a:ext cx="348009" cy="348009"/>
-          </a:xfrm>
-          <a:prstGeom prst="ellipse">
-            <a:avLst/>
-          </a:prstGeom>
-          <a:solidFill>
-            <a:srgbClr val="6E8671"/>
-          </a:solidFill>
-        </p:spPr>
-        <p:style>
-          <a:lnRef idx="2">
-            <a:schemeClr val="accent1">
-              <a:shade val="15000"/>
-            </a:schemeClr>
-          </a:lnRef>
-          <a:fillRef idx="1">
-            <a:schemeClr val="accent1"/>
-          </a:fillRef>
-          <a:effectRef idx="0">
-            <a:schemeClr val="accent1"/>
-          </a:effectRef>
-          <a:fontRef idx="minor">
-            <a:schemeClr val="lt1"/>
-          </a:fontRef>
-        </p:style>
-        <p:txBody>
-          <a:bodyPr rtlCol="0" anchor="ctr"/>
-          <a:lstStyle/>
-          <a:p>
-            <a:pPr algn="ctr"/>
-            <a:endParaRPr lang="en-GB"/>
-          </a:p>
-        </p:txBody>
-      </p:sp>
-      <p:cxnSp>
-        <p:nvCxnSpPr>
-          <p:cNvPr id="13" name="Straight Arrow Connector 12">
-            <a:extLst>
-              <a:ext uri="{FF2B5EF4-FFF2-40B4-BE49-F238E27FC236}">
-                <a16:creationId xmlns:a16="http://schemas.microsoft.com/office/drawing/2014/main" id="{621968F6-BBE5-9236-2909-314BC0805621}"/>
-              </a:ext>
-            </a:extLst>
-          </p:cNvPr>
-          <p:cNvCxnSpPr>
-            <a:cxnSpLocks/>
-          </p:cNvCxnSpPr>
-          <p:nvPr/>
-        </p:nvCxnSpPr>
-        <p:spPr>
-          <a:xfrm>
-            <a:off x="4331710" y="3588355"/>
-            <a:ext cx="499404" cy="0"/>
-          </a:xfrm>
-          <a:prstGeom prst="straightConnector1">
-            <a:avLst/>
-          </a:prstGeom>
-          <a:ln w="38100">
-            <a:solidFill>
-              <a:schemeClr val="tx1"/>
-            </a:solidFill>
-            <a:tailEnd type="triangle"/>
-          </a:ln>
-        </p:spPr>
-        <p:style>
-          <a:lnRef idx="2">
-            <a:schemeClr val="accent1"/>
-          </a:lnRef>
-          <a:fillRef idx="0">
-            <a:schemeClr val="accent1"/>
-          </a:fillRef>
-          <a:effectRef idx="1">
-            <a:schemeClr val="accent1"/>
-          </a:effectRef>
-          <a:fontRef idx="minor">
-            <a:schemeClr val="tx1"/>
-          </a:fontRef>
-        </p:style>
-      </p:cxnSp>
-      <p:cxnSp>
-        <p:nvCxnSpPr>
-          <p:cNvPr id="15" name="Straight Arrow Connector 14">
-            <a:extLst>
-              <a:ext uri="{FF2B5EF4-FFF2-40B4-BE49-F238E27FC236}">
-                <a16:creationId xmlns:a16="http://schemas.microsoft.com/office/drawing/2014/main" id="{5FAE03B5-22D1-151F-E213-531D906BCD0A}"/>
-              </a:ext>
-            </a:extLst>
-          </p:cNvPr>
-          <p:cNvCxnSpPr>
-            <a:cxnSpLocks/>
-          </p:cNvCxnSpPr>
-          <p:nvPr/>
-        </p:nvCxnSpPr>
-        <p:spPr>
-          <a:xfrm>
-            <a:off x="6381504" y="3588355"/>
-            <a:ext cx="499404" cy="0"/>
-          </a:xfrm>
-          <a:prstGeom prst="straightConnector1">
-            <a:avLst/>
-          </a:prstGeom>
-          <a:ln w="38100">
-            <a:solidFill>
-              <a:schemeClr val="tx1"/>
-            </a:solidFill>
-            <a:tailEnd type="triangle"/>
-          </a:ln>
-        </p:spPr>
-        <p:style>
-          <a:lnRef idx="2">
-            <a:schemeClr val="accent1"/>
-          </a:lnRef>
-          <a:fillRef idx="0">
-            <a:schemeClr val="accent1"/>
-          </a:fillRef>
-          <a:effectRef idx="1">
-            <a:schemeClr val="accent1"/>
-          </a:effectRef>
-          <a:fontRef idx="minor">
-            <a:schemeClr val="tx1"/>
-          </a:fontRef>
-        </p:style>
-      </p:cxnSp>
-      <p:cxnSp>
-        <p:nvCxnSpPr>
-          <p:cNvPr id="16" name="Straight Arrow Connector 15">
-            <a:extLst>
-              <a:ext uri="{FF2B5EF4-FFF2-40B4-BE49-F238E27FC236}">
-                <a16:creationId xmlns:a16="http://schemas.microsoft.com/office/drawing/2014/main" id="{97D646BE-42A7-B4D9-65A7-F45770281EA9}"/>
-              </a:ext>
-            </a:extLst>
-          </p:cNvPr>
-          <p:cNvCxnSpPr>
-            <a:cxnSpLocks/>
-          </p:cNvCxnSpPr>
-          <p:nvPr/>
-        </p:nvCxnSpPr>
-        <p:spPr>
-          <a:xfrm>
-            <a:off x="4331710" y="5152700"/>
-            <a:ext cx="499404" cy="0"/>
-          </a:xfrm>
-          <a:prstGeom prst="straightConnector1">
-            <a:avLst/>
-          </a:prstGeom>
-          <a:ln w="38100">
-            <a:solidFill>
-              <a:schemeClr val="tx1"/>
-            </a:solidFill>
-            <a:tailEnd type="triangle"/>
-          </a:ln>
-        </p:spPr>
-        <p:style>
-          <a:lnRef idx="2">
-            <a:schemeClr val="accent1"/>
-          </a:lnRef>
-          <a:fillRef idx="0">
-            <a:schemeClr val="accent1"/>
-          </a:fillRef>
-          <a:effectRef idx="1">
-            <a:schemeClr val="accent1"/>
-          </a:effectRef>
-          <a:fontRef idx="minor">
-            <a:schemeClr val="tx1"/>
-          </a:fontRef>
-        </p:style>
-      </p:cxnSp>
-      <p:cxnSp>
-        <p:nvCxnSpPr>
-          <p:cNvPr id="17" name="Straight Arrow Connector 16">
-            <a:extLst>
-              <a:ext uri="{FF2B5EF4-FFF2-40B4-BE49-F238E27FC236}">
-                <a16:creationId xmlns:a16="http://schemas.microsoft.com/office/drawing/2014/main" id="{058A1C14-0ED0-802F-BD5F-5F93A372E168}"/>
-              </a:ext>
-            </a:extLst>
-          </p:cNvPr>
-          <p:cNvCxnSpPr>
-            <a:cxnSpLocks/>
-          </p:cNvCxnSpPr>
-          <p:nvPr/>
-        </p:nvCxnSpPr>
-        <p:spPr>
-          <a:xfrm>
-            <a:off x="6381504" y="5152700"/>
-            <a:ext cx="499404" cy="0"/>
-          </a:xfrm>
-          <a:prstGeom prst="straightConnector1">
-            <a:avLst/>
-          </a:prstGeom>
-          <a:ln w="38100">
-            <a:solidFill>
-              <a:schemeClr val="tx1"/>
-            </a:solidFill>
-            <a:tailEnd type="triangle"/>
-          </a:ln>
-        </p:spPr>
-        <p:style>
-          <a:lnRef idx="2">
-            <a:schemeClr val="accent1"/>
-          </a:lnRef>
-          <a:fillRef idx="0">
-            <a:schemeClr val="accent1"/>
-          </a:fillRef>
-          <a:effectRef idx="1">
-            <a:schemeClr val="accent1"/>
-          </a:effectRef>
-          <a:fontRef idx="minor">
-            <a:schemeClr val="tx1"/>
-          </a:fontRef>
-        </p:style>
-      </p:cxnSp>
-    </p:spTree>
-    <p:extLst>
-      <p:ext uri="{BB962C8B-B14F-4D97-AF65-F5344CB8AC3E}">
-        <p14:creationId xmlns:p14="http://schemas.microsoft.com/office/powerpoint/2010/main" val="206880513"/>
-      </p:ext>
-    </p:extLst>
-  </p:cSld>
-  <p:clrMapOvr>
-    <a:masterClrMapping/>
-  </p:clrMapOvr>
-</p:sld>
-</file>
-
-<file path=ppt/slides/slide6.xml><?xml version="1.0" encoding="utf-8"?>
-<p:sld xmlns:a="http://schemas.openxmlformats.org/drawingml/2006/main" xmlns:r="http://schemas.openxmlformats.org/officeDocument/2006/relationships" xmlns:p="http://schemas.openxmlformats.org/presentationml/2006/main">
-  <p:cSld>
-    <p:spTree>
-      <p:nvGrpSpPr>
-        <p:cNvPr id="1" name="">
-          <a:extLst>
-            <a:ext uri="{FF2B5EF4-FFF2-40B4-BE49-F238E27FC236}">
-              <a16:creationId xmlns:a16="http://schemas.microsoft.com/office/drawing/2014/main" id="{B5727424-68B8-019A-F7FE-1697471AE9BE}"/>
-            </a:ext>
-          </a:extLst>
-        </p:cNvPr>
-        <p:cNvGrpSpPr/>
-        <p:nvPr/>
-      </p:nvGrpSpPr>
-      <p:grpSpPr>
-        <a:xfrm>
-          <a:off x="0" y="0"/>
-          <a:ext cx="0" cy="0"/>
-          <a:chOff x="0" y="0"/>
-          <a:chExt cx="0" cy="0"/>
-        </a:xfrm>
-      </p:grpSpPr>
-      <p:sp>
-        <p:nvSpPr>
-          <p:cNvPr id="2" name="Title 1">
-            <a:extLst>
-              <a:ext uri="{FF2B5EF4-FFF2-40B4-BE49-F238E27FC236}">
-                <a16:creationId xmlns:a16="http://schemas.microsoft.com/office/drawing/2014/main" id="{4C9B2B15-E3B1-510C-75B1-F34179C992E5}"/>
-              </a:ext>
-            </a:extLst>
-          </p:cNvPr>
-          <p:cNvSpPr>
-            <a:spLocks noGrp="1"/>
-          </p:cNvSpPr>
-          <p:nvPr>
-            <p:ph type="title"/>
-          </p:nvPr>
-        </p:nvSpPr>
-        <p:spPr/>
-        <p:txBody>
-          <a:bodyPr/>
-          <a:lstStyle/>
-          <a:p>
-            <a:r>
-              <a:rPr lang="en-GB" dirty="0">
-                <a:latin typeface="Arial" panose="020B0604020202020204" pitchFamily="34" charset="0"/>
-                <a:cs typeface="Arial" panose="020B0604020202020204" pitchFamily="34" charset="0"/>
-              </a:rPr>
-              <a:t>One Solution: Connecting and Tracking  Z-Stacks</a:t>
-            </a:r>
-          </a:p>
-        </p:txBody>
-      </p:sp>
-      <p:sp>
-        <p:nvSpPr>
-          <p:cNvPr id="5" name="Content Placeholder 4">
-            <a:extLst>
-              <a:ext uri="{FF2B5EF4-FFF2-40B4-BE49-F238E27FC236}">
-                <a16:creationId xmlns:a16="http://schemas.microsoft.com/office/drawing/2014/main" id="{33A1FF77-45B1-AD53-B86A-E771F7004971}"/>
-              </a:ext>
-            </a:extLst>
-          </p:cNvPr>
-          <p:cNvSpPr>
-            <a:spLocks noGrp="1"/>
-          </p:cNvSpPr>
-          <p:nvPr>
-            <p:ph idx="1"/>
-          </p:nvPr>
-        </p:nvSpPr>
-        <p:spPr>
-          <a:xfrm>
-            <a:off x="838200" y="1825625"/>
-            <a:ext cx="10515600" cy="969214"/>
-          </a:xfrm>
-        </p:spPr>
-        <p:txBody>
-          <a:bodyPr>
-            <a:normAutofit/>
-          </a:bodyPr>
-          <a:lstStyle/>
-          <a:p>
-            <a:r>
-              <a:rPr lang="en-GB" dirty="0">
-                <a:latin typeface="Arial" panose="020B0604020202020204" pitchFamily="34" charset="0"/>
-                <a:cs typeface="Arial" panose="020B0604020202020204" pitchFamily="34" charset="0"/>
-              </a:rPr>
-              <a:t>Measuring filament growth rate requires disentangling from rotation</a:t>
-            </a:r>
-          </a:p>
-        </p:txBody>
-      </p:sp>
-      <p:grpSp>
-        <p:nvGrpSpPr>
-          <p:cNvPr id="7" name="Group 6">
-            <a:extLst>
-              <a:ext uri="{FF2B5EF4-FFF2-40B4-BE49-F238E27FC236}">
-                <a16:creationId xmlns:a16="http://schemas.microsoft.com/office/drawing/2014/main" id="{7531A388-FCF1-F542-583A-B9047A267F0C}"/>
-              </a:ext>
-            </a:extLst>
-          </p:cNvPr>
-          <p:cNvGrpSpPr/>
-          <p:nvPr/>
-        </p:nvGrpSpPr>
-        <p:grpSpPr>
-          <a:xfrm>
-            <a:off x="3281475" y="3272117"/>
-            <a:ext cx="5453354" cy="2205318"/>
-            <a:chOff x="3281475" y="3272117"/>
-            <a:chExt cx="5453354" cy="2205318"/>
-          </a:xfrm>
-        </p:grpSpPr>
-        <p:sp>
-          <p:nvSpPr>
-            <p:cNvPr id="3" name="Can 2">
-              <a:extLst>
-                <a:ext uri="{FF2B5EF4-FFF2-40B4-BE49-F238E27FC236}">
-                  <a16:creationId xmlns:a16="http://schemas.microsoft.com/office/drawing/2014/main" id="{3DAB23B9-C289-756E-8828-116099F924B7}"/>
-                </a:ext>
-              </a:extLst>
-            </p:cNvPr>
-            <p:cNvSpPr/>
-            <p:nvPr/>
-          </p:nvSpPr>
-          <p:spPr>
-            <a:xfrm rot="2900441">
-              <a:off x="7563151" y="2595105"/>
-              <a:ext cx="356851" cy="1986504"/>
-            </a:xfrm>
-            <a:prstGeom prst="can">
-              <a:avLst/>
-            </a:prstGeom>
-            <a:solidFill>
-              <a:schemeClr val="accent3">
-                <a:lumMod val="50000"/>
-              </a:schemeClr>
-            </a:solidFill>
-          </p:spPr>
-          <p:style>
-            <a:lnRef idx="2">
-              <a:schemeClr val="accent1">
-                <a:shade val="15000"/>
-              </a:schemeClr>
-            </a:lnRef>
-            <a:fillRef idx="1">
-              <a:schemeClr val="accent1"/>
-            </a:fillRef>
-            <a:effectRef idx="0">
-              <a:schemeClr val="accent1"/>
-            </a:effectRef>
-            <a:fontRef idx="minor">
-              <a:schemeClr val="lt1"/>
-            </a:fontRef>
-          </p:style>
-          <p:txBody>
-            <a:bodyPr rtlCol="0" anchor="ctr"/>
-            <a:lstStyle/>
-            <a:p>
-              <a:pPr algn="ctr"/>
-              <a:endParaRPr lang="en-GB"/>
-            </a:p>
-          </p:txBody>
-        </p:sp>
-        <p:sp>
-          <p:nvSpPr>
-            <p:cNvPr id="4" name="Oval 3">
-              <a:extLst>
-                <a:ext uri="{FF2B5EF4-FFF2-40B4-BE49-F238E27FC236}">
-                  <a16:creationId xmlns:a16="http://schemas.microsoft.com/office/drawing/2014/main" id="{1DF91532-1A43-08CD-FDFC-4460AD705EAB}"/>
-                </a:ext>
-              </a:extLst>
-            </p:cNvPr>
-            <p:cNvSpPr/>
-            <p:nvPr/>
-          </p:nvSpPr>
-          <p:spPr>
-            <a:xfrm>
-              <a:off x="3747454" y="3414356"/>
-              <a:ext cx="348009" cy="348009"/>
-            </a:xfrm>
-            <a:prstGeom prst="ellipse">
-              <a:avLst/>
-            </a:prstGeom>
-            <a:solidFill>
-              <a:srgbClr val="6E8671"/>
-            </a:solidFill>
-          </p:spPr>
-          <p:style>
-            <a:lnRef idx="2">
-              <a:schemeClr val="accent1">
-                <a:shade val="15000"/>
-              </a:schemeClr>
-            </a:lnRef>
-            <a:fillRef idx="1">
-              <a:schemeClr val="accent1"/>
-            </a:fillRef>
-            <a:effectRef idx="0">
-              <a:schemeClr val="accent1"/>
-            </a:effectRef>
-            <a:fontRef idx="minor">
-              <a:schemeClr val="lt1"/>
-            </a:fontRef>
-          </p:style>
-          <p:txBody>
-            <a:bodyPr rtlCol="0" anchor="ctr"/>
-            <a:lstStyle/>
-            <a:p>
-              <a:pPr algn="ctr"/>
-              <a:endParaRPr lang="en-GB"/>
-            </a:p>
-          </p:txBody>
-        </p:sp>
-        <p:sp>
-          <p:nvSpPr>
-            <p:cNvPr id="6" name="Can 5">
-              <a:extLst>
-                <a:ext uri="{FF2B5EF4-FFF2-40B4-BE49-F238E27FC236}">
-                  <a16:creationId xmlns:a16="http://schemas.microsoft.com/office/drawing/2014/main" id="{95586217-3ED9-6C08-C92F-107453677F3D}"/>
-                </a:ext>
-              </a:extLst>
-            </p:cNvPr>
-            <p:cNvSpPr/>
-            <p:nvPr/>
-          </p:nvSpPr>
-          <p:spPr>
-            <a:xfrm rot="2900441">
-              <a:off x="5407919" y="3064930"/>
-              <a:ext cx="356851" cy="1046851"/>
-            </a:xfrm>
-            <a:prstGeom prst="can">
-              <a:avLst/>
-            </a:prstGeom>
-            <a:solidFill>
-              <a:schemeClr val="accent3">
-                <a:lumMod val="50000"/>
-              </a:schemeClr>
-            </a:solidFill>
-          </p:spPr>
-          <p:style>
-            <a:lnRef idx="2">
-              <a:schemeClr val="accent1">
-                <a:shade val="15000"/>
-              </a:schemeClr>
-            </a:lnRef>
-            <a:fillRef idx="1">
-              <a:schemeClr val="accent1"/>
-            </a:fillRef>
-            <a:effectRef idx="0">
-              <a:schemeClr val="accent1"/>
-            </a:effectRef>
-            <a:fontRef idx="minor">
-              <a:schemeClr val="lt1"/>
-            </a:fontRef>
-          </p:style>
-          <p:txBody>
-            <a:bodyPr rtlCol="0" anchor="ctr"/>
-            <a:lstStyle/>
-            <a:p>
-              <a:pPr algn="ctr"/>
-              <a:endParaRPr lang="en-GB"/>
-            </a:p>
-          </p:txBody>
-        </p:sp>
-        <p:sp>
-          <p:nvSpPr>
-            <p:cNvPr id="9" name="Oval 8">
-              <a:extLst>
-                <a:ext uri="{FF2B5EF4-FFF2-40B4-BE49-F238E27FC236}">
-                  <a16:creationId xmlns:a16="http://schemas.microsoft.com/office/drawing/2014/main" id="{C3960152-F5D0-BE75-7D73-2AD6F9403A61}"/>
-                </a:ext>
-              </a:extLst>
-            </p:cNvPr>
-            <p:cNvSpPr/>
-            <p:nvPr/>
-          </p:nvSpPr>
-          <p:spPr>
-            <a:xfrm>
-              <a:off x="3747453" y="4978697"/>
-              <a:ext cx="348009" cy="348009"/>
-            </a:xfrm>
-            <a:prstGeom prst="ellipse">
-              <a:avLst/>
-            </a:prstGeom>
-            <a:solidFill>
-              <a:srgbClr val="6E8671"/>
-            </a:solidFill>
-          </p:spPr>
-          <p:style>
-            <a:lnRef idx="2">
-              <a:schemeClr val="accent1">
-                <a:shade val="15000"/>
-              </a:schemeClr>
-            </a:lnRef>
-            <a:fillRef idx="1">
-              <a:schemeClr val="accent1"/>
-            </a:fillRef>
-            <a:effectRef idx="0">
-              <a:schemeClr val="accent1"/>
-            </a:effectRef>
-            <a:fontRef idx="minor">
-              <a:schemeClr val="lt1"/>
-            </a:fontRef>
-          </p:style>
-          <p:txBody>
-            <a:bodyPr rtlCol="0" anchor="ctr"/>
-            <a:lstStyle/>
-            <a:p>
-              <a:pPr algn="ctr"/>
-              <a:endParaRPr lang="en-GB"/>
-            </a:p>
-          </p:txBody>
-        </p:sp>
-        <p:sp>
-          <p:nvSpPr>
-            <p:cNvPr id="10" name="Oval 9">
-              <a:extLst>
-                <a:ext uri="{FF2B5EF4-FFF2-40B4-BE49-F238E27FC236}">
-                  <a16:creationId xmlns:a16="http://schemas.microsoft.com/office/drawing/2014/main" id="{FA5CE578-F6D5-D870-65B2-7697F5B12839}"/>
-                </a:ext>
-              </a:extLst>
-            </p:cNvPr>
-            <p:cNvSpPr/>
-            <p:nvPr/>
-          </p:nvSpPr>
-          <p:spPr>
-            <a:xfrm>
-              <a:off x="5412339" y="4978696"/>
-              <a:ext cx="348009" cy="348009"/>
-            </a:xfrm>
-            <a:prstGeom prst="ellipse">
-              <a:avLst/>
-            </a:prstGeom>
-            <a:solidFill>
-              <a:srgbClr val="6E8671"/>
-            </a:solidFill>
-          </p:spPr>
-          <p:style>
-            <a:lnRef idx="2">
-              <a:schemeClr val="accent1">
-                <a:shade val="15000"/>
-              </a:schemeClr>
-            </a:lnRef>
-            <a:fillRef idx="1">
-              <a:schemeClr val="accent1"/>
-            </a:fillRef>
-            <a:effectRef idx="0">
-              <a:schemeClr val="accent1"/>
-            </a:effectRef>
-            <a:fontRef idx="minor">
-              <a:schemeClr val="lt1"/>
-            </a:fontRef>
-          </p:style>
-          <p:txBody>
-            <a:bodyPr rtlCol="0" anchor="ctr"/>
-            <a:lstStyle/>
-            <a:p>
-              <a:pPr algn="ctr"/>
-              <a:endParaRPr lang="en-GB"/>
-            </a:p>
-          </p:txBody>
-        </p:sp>
-        <p:sp>
-          <p:nvSpPr>
-            <p:cNvPr id="11" name="Oval 10">
-              <a:extLst>
-                <a:ext uri="{FF2B5EF4-FFF2-40B4-BE49-F238E27FC236}">
-                  <a16:creationId xmlns:a16="http://schemas.microsoft.com/office/drawing/2014/main" id="{6119C1A7-4E86-AC45-4FCF-1113C18CFC60}"/>
-                </a:ext>
-              </a:extLst>
-            </p:cNvPr>
-            <p:cNvSpPr/>
-            <p:nvPr/>
-          </p:nvSpPr>
-          <p:spPr>
-            <a:xfrm>
-              <a:off x="7567571" y="4978696"/>
-              <a:ext cx="348009" cy="348009"/>
-            </a:xfrm>
-            <a:prstGeom prst="ellipse">
-              <a:avLst/>
-            </a:prstGeom>
-            <a:solidFill>
-              <a:srgbClr val="6E8671"/>
-            </a:solidFill>
-          </p:spPr>
-          <p:style>
-            <a:lnRef idx="2">
-              <a:schemeClr val="accent1">
-                <a:shade val="15000"/>
-              </a:schemeClr>
-            </a:lnRef>
-            <a:fillRef idx="1">
-              <a:schemeClr val="accent1"/>
-            </a:fillRef>
-            <a:effectRef idx="0">
-              <a:schemeClr val="accent1"/>
-            </a:effectRef>
-            <a:fontRef idx="minor">
-              <a:schemeClr val="lt1"/>
-            </a:fontRef>
-          </p:style>
-          <p:txBody>
-            <a:bodyPr rtlCol="0" anchor="ctr"/>
-            <a:lstStyle/>
-            <a:p>
-              <a:pPr algn="ctr"/>
-              <a:endParaRPr lang="en-GB"/>
-            </a:p>
-          </p:txBody>
-        </p:sp>
-        <p:cxnSp>
-          <p:nvCxnSpPr>
-            <p:cNvPr id="13" name="Straight Arrow Connector 12">
-              <a:extLst>
-                <a:ext uri="{FF2B5EF4-FFF2-40B4-BE49-F238E27FC236}">
-                  <a16:creationId xmlns:a16="http://schemas.microsoft.com/office/drawing/2014/main" id="{2D3DBCC2-AA03-399F-E0E7-2667ADD80386}"/>
-                </a:ext>
-              </a:extLst>
-            </p:cNvPr>
-            <p:cNvCxnSpPr>
-              <a:cxnSpLocks/>
-            </p:cNvCxnSpPr>
-            <p:nvPr/>
-          </p:nvCxnSpPr>
-          <p:spPr>
-            <a:xfrm>
-              <a:off x="4331710" y="3588355"/>
-              <a:ext cx="499404" cy="0"/>
-            </a:xfrm>
-            <a:prstGeom prst="straightConnector1">
-              <a:avLst/>
-            </a:prstGeom>
-            <a:ln w="38100">
-              <a:solidFill>
-                <a:schemeClr val="tx1"/>
-              </a:solidFill>
-              <a:tailEnd type="triangle"/>
-            </a:ln>
-          </p:spPr>
-          <p:style>
-            <a:lnRef idx="2">
-              <a:schemeClr val="accent1"/>
-            </a:lnRef>
-            <a:fillRef idx="0">
-              <a:schemeClr val="accent1"/>
-            </a:fillRef>
-            <a:effectRef idx="1">
-              <a:schemeClr val="accent1"/>
-            </a:effectRef>
-            <a:fontRef idx="minor">
-              <a:schemeClr val="tx1"/>
-            </a:fontRef>
-          </p:style>
-        </p:cxnSp>
-        <p:cxnSp>
-          <p:nvCxnSpPr>
-            <p:cNvPr id="15" name="Straight Arrow Connector 14">
-              <a:extLst>
-                <a:ext uri="{FF2B5EF4-FFF2-40B4-BE49-F238E27FC236}">
-                  <a16:creationId xmlns:a16="http://schemas.microsoft.com/office/drawing/2014/main" id="{44EF35F8-87E6-40F1-B29C-695AB7BE1D1B}"/>
-                </a:ext>
-              </a:extLst>
-            </p:cNvPr>
-            <p:cNvCxnSpPr>
-              <a:cxnSpLocks/>
-            </p:cNvCxnSpPr>
-            <p:nvPr/>
-          </p:nvCxnSpPr>
-          <p:spPr>
-            <a:xfrm>
-              <a:off x="6381504" y="3588355"/>
-              <a:ext cx="499404" cy="0"/>
-            </a:xfrm>
-            <a:prstGeom prst="straightConnector1">
-              <a:avLst/>
-            </a:prstGeom>
-            <a:ln w="38100">
-              <a:solidFill>
-                <a:schemeClr val="tx1"/>
-              </a:solidFill>
-              <a:tailEnd type="triangle"/>
-            </a:ln>
-          </p:spPr>
-          <p:style>
-            <a:lnRef idx="2">
-              <a:schemeClr val="accent1"/>
-            </a:lnRef>
-            <a:fillRef idx="0">
-              <a:schemeClr val="accent1"/>
-            </a:fillRef>
-            <a:effectRef idx="1">
-              <a:schemeClr val="accent1"/>
-            </a:effectRef>
-            <a:fontRef idx="minor">
-              <a:schemeClr val="tx1"/>
-            </a:fontRef>
-          </p:style>
-        </p:cxnSp>
-        <p:cxnSp>
-          <p:nvCxnSpPr>
-            <p:cNvPr id="16" name="Straight Arrow Connector 15">
-              <a:extLst>
-                <a:ext uri="{FF2B5EF4-FFF2-40B4-BE49-F238E27FC236}">
-                  <a16:creationId xmlns:a16="http://schemas.microsoft.com/office/drawing/2014/main" id="{C3D33A4D-9FEE-681F-E292-E65AC2D374EA}"/>
-                </a:ext>
-              </a:extLst>
-            </p:cNvPr>
-            <p:cNvCxnSpPr>
-              <a:cxnSpLocks/>
-            </p:cNvCxnSpPr>
-            <p:nvPr/>
-          </p:nvCxnSpPr>
-          <p:spPr>
-            <a:xfrm>
-              <a:off x="4331710" y="5152700"/>
-              <a:ext cx="499404" cy="0"/>
-            </a:xfrm>
-            <a:prstGeom prst="straightConnector1">
-              <a:avLst/>
-            </a:prstGeom>
-            <a:ln w="38100">
-              <a:solidFill>
-                <a:schemeClr val="tx1"/>
-              </a:solidFill>
-              <a:tailEnd type="triangle"/>
-            </a:ln>
-          </p:spPr>
-          <p:style>
-            <a:lnRef idx="2">
-              <a:schemeClr val="accent1"/>
-            </a:lnRef>
-            <a:fillRef idx="0">
-              <a:schemeClr val="accent1"/>
-            </a:fillRef>
-            <a:effectRef idx="1">
-              <a:schemeClr val="accent1"/>
-            </a:effectRef>
-            <a:fontRef idx="minor">
-              <a:schemeClr val="tx1"/>
-            </a:fontRef>
-          </p:style>
-        </p:cxnSp>
-        <p:cxnSp>
-          <p:nvCxnSpPr>
-            <p:cNvPr id="17" name="Straight Arrow Connector 16">
-              <a:extLst>
-                <a:ext uri="{FF2B5EF4-FFF2-40B4-BE49-F238E27FC236}">
-                  <a16:creationId xmlns:a16="http://schemas.microsoft.com/office/drawing/2014/main" id="{D2F1987E-D891-D8FF-9545-BE54719A1221}"/>
-                </a:ext>
-              </a:extLst>
-            </p:cNvPr>
-            <p:cNvCxnSpPr>
-              <a:cxnSpLocks/>
-            </p:cNvCxnSpPr>
-            <p:nvPr/>
-          </p:nvCxnSpPr>
-          <p:spPr>
-            <a:xfrm>
-              <a:off x="6381504" y="5152700"/>
-              <a:ext cx="499404" cy="0"/>
-            </a:xfrm>
-            <a:prstGeom prst="straightConnector1">
-              <a:avLst/>
-            </a:prstGeom>
-            <a:ln w="38100">
-              <a:solidFill>
-                <a:schemeClr val="tx1"/>
-              </a:solidFill>
-              <a:tailEnd type="triangle"/>
-            </a:ln>
-          </p:spPr>
-          <p:style>
-            <a:lnRef idx="2">
-              <a:schemeClr val="accent1"/>
-            </a:lnRef>
-            <a:fillRef idx="0">
-              <a:schemeClr val="accent1"/>
-            </a:fillRef>
-            <a:effectRef idx="1">
-              <a:schemeClr val="accent1"/>
-            </a:effectRef>
-            <a:fontRef idx="minor">
-              <a:schemeClr val="tx1"/>
-            </a:fontRef>
-          </p:style>
-        </p:cxnSp>
-        <p:grpSp>
-          <p:nvGrpSpPr>
-            <p:cNvPr id="27" name="Group 26">
-              <a:extLst>
-                <a:ext uri="{FF2B5EF4-FFF2-40B4-BE49-F238E27FC236}">
-                  <a16:creationId xmlns:a16="http://schemas.microsoft.com/office/drawing/2014/main" id="{47CB9D10-95D1-7E79-A409-B2F296E36BDF}"/>
-                </a:ext>
-              </a:extLst>
-            </p:cNvPr>
-            <p:cNvGrpSpPr/>
-            <p:nvPr/>
-          </p:nvGrpSpPr>
-          <p:grpSpPr>
-            <a:xfrm>
-              <a:off x="3281475" y="4840941"/>
-              <a:ext cx="5056094" cy="636494"/>
-              <a:chOff x="3249968" y="4840941"/>
-              <a:chExt cx="5056094" cy="636494"/>
-            </a:xfrm>
-          </p:grpSpPr>
-          <p:cxnSp>
-            <p:nvCxnSpPr>
-              <p:cNvPr id="8" name="Straight Connector 7">
-                <a:extLst>
-                  <a:ext uri="{FF2B5EF4-FFF2-40B4-BE49-F238E27FC236}">
-                    <a16:creationId xmlns:a16="http://schemas.microsoft.com/office/drawing/2014/main" id="{432CCEC1-91DC-1D10-EE6C-37F6887AAC7F}"/>
-                  </a:ext>
-                </a:extLst>
-              </p:cNvPr>
-              <p:cNvCxnSpPr>
-                <a:cxnSpLocks/>
-              </p:cNvCxnSpPr>
-              <p:nvPr/>
-            </p:nvCxnSpPr>
-            <p:spPr>
-              <a:xfrm>
-                <a:off x="3249968" y="4840941"/>
-                <a:ext cx="5056094" cy="0"/>
-              </a:xfrm>
-              <a:prstGeom prst="line">
-                <a:avLst/>
-              </a:prstGeom>
-              <a:ln w="25400">
-                <a:prstDash val="dash"/>
-              </a:ln>
-            </p:spPr>
-            <p:style>
-              <a:lnRef idx="2">
-                <a:schemeClr val="dk1"/>
-              </a:lnRef>
-              <a:fillRef idx="0">
-                <a:schemeClr val="dk1"/>
-              </a:fillRef>
-              <a:effectRef idx="1">
-                <a:schemeClr val="dk1"/>
-              </a:effectRef>
-              <a:fontRef idx="minor">
-                <a:schemeClr val="tx1"/>
-              </a:fontRef>
-            </p:style>
-          </p:cxnSp>
-          <p:cxnSp>
-            <p:nvCxnSpPr>
-              <p:cNvPr id="12" name="Straight Connector 11">
-                <a:extLst>
-                  <a:ext uri="{FF2B5EF4-FFF2-40B4-BE49-F238E27FC236}">
-                    <a16:creationId xmlns:a16="http://schemas.microsoft.com/office/drawing/2014/main" id="{B8602331-A44B-8C68-BC87-977DBB6BED00}"/>
-                  </a:ext>
-                </a:extLst>
-              </p:cNvPr>
-              <p:cNvCxnSpPr>
-                <a:cxnSpLocks/>
-              </p:cNvCxnSpPr>
-              <p:nvPr/>
-            </p:nvCxnSpPr>
-            <p:spPr>
-              <a:xfrm>
-                <a:off x="3249968" y="5159188"/>
-                <a:ext cx="5056094" cy="0"/>
-              </a:xfrm>
-              <a:prstGeom prst="line">
-                <a:avLst/>
-              </a:prstGeom>
-              <a:ln w="25400">
-                <a:prstDash val="dash"/>
-              </a:ln>
-            </p:spPr>
-            <p:style>
-              <a:lnRef idx="2">
-                <a:schemeClr val="dk1"/>
-              </a:lnRef>
-              <a:fillRef idx="0">
-                <a:schemeClr val="dk1"/>
-              </a:fillRef>
-              <a:effectRef idx="1">
-                <a:schemeClr val="dk1"/>
-              </a:effectRef>
-              <a:fontRef idx="minor">
-                <a:schemeClr val="tx1"/>
-              </a:fontRef>
-            </p:style>
-          </p:cxnSp>
-          <p:cxnSp>
-            <p:nvCxnSpPr>
-              <p:cNvPr id="14" name="Straight Connector 13">
-                <a:extLst>
-                  <a:ext uri="{FF2B5EF4-FFF2-40B4-BE49-F238E27FC236}">
-                    <a16:creationId xmlns:a16="http://schemas.microsoft.com/office/drawing/2014/main" id="{958C3606-44CC-3291-025D-A1CD80B6B1AC}"/>
-                  </a:ext>
-                </a:extLst>
-              </p:cNvPr>
-              <p:cNvCxnSpPr>
-                <a:cxnSpLocks/>
-              </p:cNvCxnSpPr>
-              <p:nvPr/>
-            </p:nvCxnSpPr>
-            <p:spPr>
-              <a:xfrm>
-                <a:off x="3249968" y="5477435"/>
-                <a:ext cx="5056094" cy="0"/>
-              </a:xfrm>
-              <a:prstGeom prst="line">
-                <a:avLst/>
-              </a:prstGeom>
-              <a:ln w="25400">
-                <a:prstDash val="dash"/>
-              </a:ln>
-            </p:spPr>
-            <p:style>
-              <a:lnRef idx="2">
-                <a:schemeClr val="dk1"/>
-              </a:lnRef>
-              <a:fillRef idx="0">
-                <a:schemeClr val="dk1"/>
-              </a:fillRef>
-              <a:effectRef idx="1">
-                <a:schemeClr val="dk1"/>
-              </a:effectRef>
-              <a:fontRef idx="minor">
-                <a:schemeClr val="tx1"/>
-              </a:fontRef>
-            </p:style>
-          </p:cxnSp>
-        </p:grpSp>
-        <p:grpSp>
-          <p:nvGrpSpPr>
-            <p:cNvPr id="26" name="Group 25">
-              <a:extLst>
-                <a:ext uri="{FF2B5EF4-FFF2-40B4-BE49-F238E27FC236}">
-                  <a16:creationId xmlns:a16="http://schemas.microsoft.com/office/drawing/2014/main" id="{F71348C1-4628-5DAD-FA7E-6B71919EB319}"/>
-                </a:ext>
-              </a:extLst>
-            </p:cNvPr>
-            <p:cNvGrpSpPr/>
-            <p:nvPr/>
-          </p:nvGrpSpPr>
-          <p:grpSpPr>
-            <a:xfrm>
-              <a:off x="3281475" y="3272117"/>
-              <a:ext cx="5056094" cy="636494"/>
-              <a:chOff x="3232301" y="3272117"/>
-              <a:chExt cx="5056094" cy="636494"/>
-            </a:xfrm>
-          </p:grpSpPr>
-          <p:cxnSp>
-            <p:nvCxnSpPr>
-              <p:cNvPr id="23" name="Straight Connector 22">
-                <a:extLst>
-                  <a:ext uri="{FF2B5EF4-FFF2-40B4-BE49-F238E27FC236}">
-                    <a16:creationId xmlns:a16="http://schemas.microsoft.com/office/drawing/2014/main" id="{941ED134-FF55-0A8C-FB86-481CBDFBDE0C}"/>
-                  </a:ext>
-                </a:extLst>
-              </p:cNvPr>
-              <p:cNvCxnSpPr>
-                <a:cxnSpLocks/>
-              </p:cNvCxnSpPr>
-              <p:nvPr/>
-            </p:nvCxnSpPr>
-            <p:spPr>
-              <a:xfrm>
-                <a:off x="3232301" y="3272117"/>
-                <a:ext cx="5056094" cy="0"/>
-              </a:xfrm>
-              <a:prstGeom prst="line">
-                <a:avLst/>
-              </a:prstGeom>
-              <a:ln w="25400">
-                <a:prstDash val="dash"/>
-              </a:ln>
-            </p:spPr>
-            <p:style>
-              <a:lnRef idx="2">
-                <a:schemeClr val="dk1"/>
-              </a:lnRef>
-              <a:fillRef idx="0">
-                <a:schemeClr val="dk1"/>
-              </a:fillRef>
-              <a:effectRef idx="1">
-                <a:schemeClr val="dk1"/>
-              </a:effectRef>
-              <a:fontRef idx="minor">
-                <a:schemeClr val="tx1"/>
-              </a:fontRef>
-            </p:style>
-          </p:cxnSp>
-          <p:cxnSp>
-            <p:nvCxnSpPr>
-              <p:cNvPr id="24" name="Straight Connector 23">
-                <a:extLst>
-                  <a:ext uri="{FF2B5EF4-FFF2-40B4-BE49-F238E27FC236}">
-                    <a16:creationId xmlns:a16="http://schemas.microsoft.com/office/drawing/2014/main" id="{8B65DEE9-73D4-5FF1-1B20-D88AD4C84319}"/>
-                  </a:ext>
-                </a:extLst>
-              </p:cNvPr>
-              <p:cNvCxnSpPr>
-                <a:cxnSpLocks/>
-              </p:cNvCxnSpPr>
-              <p:nvPr/>
-            </p:nvCxnSpPr>
-            <p:spPr>
-              <a:xfrm>
-                <a:off x="3232301" y="3590364"/>
-                <a:ext cx="5056094" cy="0"/>
-              </a:xfrm>
-              <a:prstGeom prst="line">
-                <a:avLst/>
-              </a:prstGeom>
-              <a:ln w="25400">
-                <a:prstDash val="dash"/>
-              </a:ln>
-            </p:spPr>
-            <p:style>
-              <a:lnRef idx="2">
-                <a:schemeClr val="dk1"/>
-              </a:lnRef>
-              <a:fillRef idx="0">
-                <a:schemeClr val="dk1"/>
-              </a:fillRef>
-              <a:effectRef idx="1">
-                <a:schemeClr val="dk1"/>
-              </a:effectRef>
-              <a:fontRef idx="minor">
-                <a:schemeClr val="tx1"/>
-              </a:fontRef>
-            </p:style>
-          </p:cxnSp>
-          <p:cxnSp>
-            <p:nvCxnSpPr>
-              <p:cNvPr id="25" name="Straight Connector 24">
-                <a:extLst>
-                  <a:ext uri="{FF2B5EF4-FFF2-40B4-BE49-F238E27FC236}">
-                    <a16:creationId xmlns:a16="http://schemas.microsoft.com/office/drawing/2014/main" id="{90C83916-2959-BF71-A7DF-78B6DCF84620}"/>
-                  </a:ext>
-                </a:extLst>
-              </p:cNvPr>
-              <p:cNvCxnSpPr>
-                <a:cxnSpLocks/>
-              </p:cNvCxnSpPr>
-              <p:nvPr/>
-            </p:nvCxnSpPr>
-            <p:spPr>
-              <a:xfrm>
-                <a:off x="3232301" y="3908611"/>
-                <a:ext cx="5056094" cy="0"/>
-              </a:xfrm>
-              <a:prstGeom prst="line">
-                <a:avLst/>
-              </a:prstGeom>
-              <a:ln w="25400">
-                <a:prstDash val="dash"/>
-              </a:ln>
-            </p:spPr>
-            <p:style>
-              <a:lnRef idx="2">
-                <a:schemeClr val="dk1"/>
-              </a:lnRef>
-              <a:fillRef idx="0">
-                <a:schemeClr val="dk1"/>
-              </a:fillRef>
-              <a:effectRef idx="1">
-                <a:schemeClr val="dk1"/>
-              </a:effectRef>
-              <a:fontRef idx="minor">
-                <a:schemeClr val="tx1"/>
-              </a:fontRef>
-            </p:style>
-          </p:cxnSp>
-        </p:grpSp>
-      </p:grpSp>
-    </p:spTree>
-    <p:extLst>
-      <p:ext uri="{BB962C8B-B14F-4D97-AF65-F5344CB8AC3E}">
-        <p14:creationId xmlns:p14="http://schemas.microsoft.com/office/powerpoint/2010/main" val="2683170475"/>
-      </p:ext>
-    </p:extLst>
-  </p:cSld>
-  <p:clrMapOvr>
-    <a:masterClrMapping/>
-  </p:clrMapOvr>
-</p:sld>
-</file>
-
 <file path=ppt/theme/theme1.xml><?xml version="1.0" encoding="utf-8"?>
 <a:theme xmlns:a="http://schemas.openxmlformats.org/drawingml/2006/main" name="Office Theme">
   <a:themeElements>

--- a/Presentations/Biohack_Presentation.pptx
+++ b/Presentations/Biohack_Presentation.pptx
@@ -4197,7 +4197,7 @@
           <a:lstStyle/>
           <a:p>
             <a:r>
-              <a:rPr lang="en-GB" dirty="0">
+              <a:rPr lang="en-GB" sz="2600" dirty="0">
                 <a:latin typeface="Arial" panose="020B0604020202020204" pitchFamily="34" charset="0"/>
                 <a:cs typeface="Arial" panose="020B0604020202020204" pitchFamily="34" charset="0"/>
               </a:rPr>
@@ -4206,7 +4206,7 @@
           </a:p>
           <a:p>
             <a:r>
-              <a:rPr lang="en-GB" dirty="0">
+              <a:rPr lang="en-GB" sz="2600" dirty="0">
                 <a:latin typeface="Arial" panose="020B0604020202020204" pitchFamily="34" charset="0"/>
                 <a:cs typeface="Arial" panose="020B0604020202020204" pitchFamily="34" charset="0"/>
               </a:rPr>
@@ -4216,7 +4216,7 @@
           <a:p>
             <a:pPr lvl="1"/>
             <a:r>
-              <a:rPr lang="en-GB" sz="2800" dirty="0">
+              <a:rPr lang="en-GB" sz="2600" dirty="0">
                 <a:latin typeface="Arial" panose="020B0604020202020204" pitchFamily="34" charset="0"/>
                 <a:cs typeface="Arial" panose="020B0604020202020204" pitchFamily="34" charset="0"/>
               </a:rPr>
@@ -4226,7 +4226,7 @@
           <a:p>
             <a:pPr lvl="1"/>
             <a:r>
-              <a:rPr lang="en-GB" sz="2800" dirty="0">
+              <a:rPr lang="en-GB" sz="2600" dirty="0">
                 <a:latin typeface="Arial" panose="020B0604020202020204" pitchFamily="34" charset="0"/>
                 <a:cs typeface="Arial" panose="020B0604020202020204" pitchFamily="34" charset="0"/>
               </a:rPr>
@@ -4236,7 +4236,7 @@
           <a:p>
             <a:pPr lvl="1"/>
             <a:r>
-              <a:rPr lang="en-GB" sz="2800" dirty="0">
+              <a:rPr lang="en-GB" sz="2600" dirty="0">
                 <a:latin typeface="Arial" panose="020B0604020202020204" pitchFamily="34" charset="0"/>
                 <a:cs typeface="Arial" panose="020B0604020202020204" pitchFamily="34" charset="0"/>
               </a:rPr>
@@ -4246,7 +4246,7 @@
           <a:p>
             <a:pPr lvl="1"/>
             <a:r>
-              <a:rPr lang="en-GB" sz="2800" dirty="0">
+              <a:rPr lang="en-GB" sz="2600" dirty="0">
                 <a:latin typeface="Arial" panose="020B0604020202020204" pitchFamily="34" charset="0"/>
                 <a:cs typeface="Arial" panose="020B0604020202020204" pitchFamily="34" charset="0"/>
               </a:rPr>
@@ -4254,7 +4254,7 @@
             </a:r>
           </a:p>
           <a:p>
-            <a:endParaRPr lang="en-GB" dirty="0"/>
+            <a:endParaRPr lang="en-GB" sz="2600" dirty="0"/>
           </a:p>
         </p:txBody>
       </p:sp>
@@ -4511,15 +4511,17 @@
         <p:spPr>
           <a:xfrm>
             <a:off x="838200" y="1825625"/>
-            <a:ext cx="6322764" cy="4351338"/>
+            <a:ext cx="5584634" cy="4351338"/>
           </a:xfrm>
         </p:spPr>
         <p:txBody>
-          <a:bodyPr/>
+          <a:bodyPr>
+            <a:noAutofit/>
+          </a:bodyPr>
           <a:lstStyle/>
           <a:p>
             <a:r>
-              <a:rPr lang="en-GB" dirty="0">
+              <a:rPr lang="en-GB" sz="2600" dirty="0">
                 <a:latin typeface="Arial" panose="020B0604020202020204" pitchFamily="34" charset="0"/>
                 <a:cs typeface="Arial" panose="020B0604020202020204" pitchFamily="34" charset="0"/>
               </a:rPr>
@@ -4528,7 +4530,7 @@
           </a:p>
           <a:p>
             <a:r>
-              <a:rPr lang="en-GB" dirty="0">
+              <a:rPr lang="en-GB" sz="2600" dirty="0">
                 <a:latin typeface="Arial" panose="020B0604020202020204" pitchFamily="34" charset="0"/>
                 <a:cs typeface="Arial" panose="020B0604020202020204" pitchFamily="34" charset="0"/>
               </a:rPr>
@@ -4537,16 +4539,16 @@
           </a:p>
           <a:p>
             <a:r>
-              <a:rPr lang="en-GB" dirty="0">
+              <a:rPr lang="en-GB" sz="2600" dirty="0">
                 <a:latin typeface="Arial" panose="020B0604020202020204" pitchFamily="34" charset="0"/>
                 <a:cs typeface="Arial" panose="020B0604020202020204" pitchFamily="34" charset="0"/>
               </a:rPr>
-              <a:t>Detects filaments per cell</a:t>
-            </a:r>
-          </a:p>
-          <a:p>
-            <a:r>
-              <a:rPr lang="en-GB" dirty="0">
+              <a:t>Detects filaments per cell, allowing proper tracking</a:t>
+            </a:r>
+          </a:p>
+          <a:p>
+            <a:r>
+              <a:rPr lang="en-GB" sz="2600" dirty="0">
                 <a:latin typeface="Arial" panose="020B0604020202020204" pitchFamily="34" charset="0"/>
                 <a:cs typeface="Arial" panose="020B0604020202020204" pitchFamily="34" charset="0"/>
               </a:rPr>
@@ -4555,18 +4557,12 @@
           </a:p>
           <a:p>
             <a:r>
-              <a:rPr lang="en-GB" dirty="0">
+              <a:rPr lang="en-GB" sz="2600" dirty="0">
                 <a:latin typeface="Arial" panose="020B0604020202020204" pitchFamily="34" charset="0"/>
                 <a:cs typeface="Arial" panose="020B0604020202020204" pitchFamily="34" charset="0"/>
               </a:rPr>
               <a:t>Outputs csv data displaying filament growth and change in angle</a:t>
             </a:r>
-          </a:p>
-          <a:p>
-            <a:endParaRPr lang="en-GB" dirty="0">
-              <a:latin typeface="Arial" panose="020B0604020202020204" pitchFamily="34" charset="0"/>
-              <a:cs typeface="Arial" panose="020B0604020202020204" pitchFamily="34" charset="0"/>
-            </a:endParaRPr>
           </a:p>
         </p:txBody>
       </p:sp>
@@ -4660,11 +4656,13 @@
           </a:xfrm>
         </p:spPr>
         <p:txBody>
-          <a:bodyPr/>
+          <a:bodyPr>
+            <a:normAutofit/>
+          </a:bodyPr>
           <a:lstStyle/>
           <a:p>
             <a:r>
-              <a:rPr lang="en-GB" dirty="0">
+              <a:rPr lang="en-GB" sz="2600" dirty="0">
                 <a:latin typeface="Arial" panose="020B0604020202020204" pitchFamily="34" charset="0"/>
                 <a:cs typeface="Arial" panose="020B0604020202020204" pitchFamily="34" charset="0"/>
               </a:rPr>
@@ -4673,7 +4671,7 @@
           </a:p>
           <a:p>
             <a:r>
-              <a:rPr lang="en-GB" dirty="0">
+              <a:rPr lang="en-GB" sz="2600" dirty="0">
                 <a:latin typeface="Arial" panose="020B0604020202020204" pitchFamily="34" charset="0"/>
                 <a:cs typeface="Arial" panose="020B0604020202020204" pitchFamily="34" charset="0"/>
               </a:rPr>
@@ -4682,7 +4680,7 @@
           </a:p>
           <a:p>
             <a:r>
-              <a:rPr lang="en-GB" dirty="0">
+              <a:rPr lang="en-GB" sz="2600" dirty="0">
                 <a:latin typeface="Arial" panose="020B0604020202020204" pitchFamily="34" charset="0"/>
                 <a:cs typeface="Arial" panose="020B0604020202020204" pitchFamily="34" charset="0"/>
               </a:rPr>
@@ -4691,7 +4689,7 @@
           </a:p>
           <a:p>
             <a:r>
-              <a:rPr lang="en-GB" dirty="0">
+              <a:rPr lang="en-GB" sz="2600" dirty="0">
                 <a:latin typeface="Arial" panose="020B0604020202020204" pitchFamily="34" charset="0"/>
                 <a:cs typeface="Arial" panose="020B0604020202020204" pitchFamily="34" charset="0"/>
               </a:rPr>

--- a/Presentations/Biohack_Presentation.pptx
+++ b/Presentations/Biohack_Presentation.pptx
@@ -4562,6 +4562,41 @@
                 <a:cs typeface="Arial" panose="020B0604020202020204" pitchFamily="34" charset="0"/>
               </a:rPr>
               <a:t>Outputs csv data displaying filament growth and change in angle</a:t>
+            </a:r>
+          </a:p>
+        </p:txBody>
+      </p:sp>
+      <p:sp>
+        <p:nvSpPr>
+          <p:cNvPr id="3" name="TextBox 2">
+            <a:extLst>
+              <a:ext uri="{FF2B5EF4-FFF2-40B4-BE49-F238E27FC236}">
+                <a16:creationId xmlns:a16="http://schemas.microsoft.com/office/drawing/2014/main" id="{352E2DA5-8B5B-D3F0-59C9-CCBC0B93CB94}"/>
+              </a:ext>
+            </a:extLst>
+          </p:cNvPr>
+          <p:cNvSpPr txBox="1"/>
+          <p:nvPr/>
+        </p:nvSpPr>
+        <p:spPr>
+          <a:xfrm>
+            <a:off x="7046205" y="3244334"/>
+            <a:ext cx="4307595" cy="369332"/>
+          </a:xfrm>
+          <a:prstGeom prst="rect">
+            <a:avLst/>
+          </a:prstGeom>
+          <a:noFill/>
+        </p:spPr>
+        <p:txBody>
+          <a:bodyPr wrap="square" rtlCol="0">
+            <a:spAutoFit/>
+          </a:bodyPr>
+          <a:lstStyle/>
+          <a:p>
+            <a:r>
+              <a:rPr lang="en-GB" dirty="0"/>
+              <a:t>…Put screenshot of website</a:t>
             </a:r>
           </a:p>
         </p:txBody>

--- a/Presentations/Biohack_Presentation.pptx
+++ b/Presentations/Biohack_Presentation.pptx
@@ -4729,6 +4729,15 @@
                 <a:cs typeface="Arial" panose="020B0604020202020204" pitchFamily="34" charset="0"/>
               </a:rPr>
               <a:t>Applying to situations with multiple filaments</a:t>
+            </a:r>
+          </a:p>
+          <a:p>
+            <a:r>
+              <a:rPr lang="en-GB" sz="2600" dirty="0">
+                <a:latin typeface="Arial" panose="020B0604020202020204" pitchFamily="34" charset="0"/>
+                <a:cs typeface="Arial" panose="020B0604020202020204" pitchFamily="34" charset="0"/>
+              </a:rPr>
+              <a:t>Analysis of other GFP-tagged protein filament structures</a:t>
             </a:r>
           </a:p>
         </p:txBody>

--- a/Presentations/Biohack_Presentation.pptx
+++ b/Presentations/Biohack_Presentation.pptx
@@ -4561,7 +4561,7 @@
                 <a:latin typeface="Arial" panose="020B0604020202020204" pitchFamily="34" charset="0"/>
                 <a:cs typeface="Arial" panose="020B0604020202020204" pitchFamily="34" charset="0"/>
               </a:rPr>
-              <a:t>Outputs csv data displaying filament growth and change in angle</a:t>
+              <a:t>Outputs csv data displaying filament growth</a:t>
             </a:r>
           </a:p>
         </p:txBody>
@@ -4756,7 +4756,7 @@
         </p:nvGrpSpPr>
         <p:grpSpPr>
           <a:xfrm>
-            <a:off x="8217194" y="2675731"/>
+            <a:off x="8217194" y="2766218"/>
             <a:ext cx="3277879" cy="1325563"/>
             <a:chOff x="3281475" y="3272117"/>
             <a:chExt cx="5453354" cy="2205318"/>

--- a/Presentations/Biohack_Presentation.pptx
+++ b/Presentations/Biohack_Presentation.pptx
@@ -466,6 +466,90 @@
     </a:lvl9pPr>
   </p:notesStyle>
 </p:notesMaster>
+</file>
+
+<file path=ppt/notesSlides/notesSlide1.xml><?xml version="1.0" encoding="utf-8"?>
+<p:notes xmlns:a="http://schemas.openxmlformats.org/drawingml/2006/main" xmlns:r="http://schemas.openxmlformats.org/officeDocument/2006/relationships" xmlns:p="http://schemas.openxmlformats.org/presentationml/2006/main">
+  <p:cSld>
+    <p:spTree>
+      <p:nvGrpSpPr>
+        <p:cNvPr id="1" name=""/>
+        <p:cNvGrpSpPr/>
+        <p:nvPr/>
+      </p:nvGrpSpPr>
+      <p:grpSpPr>
+        <a:xfrm>
+          <a:off x="0" y="0"/>
+          <a:ext cx="0" cy="0"/>
+          <a:chOff x="0" y="0"/>
+          <a:chExt cx="0" cy="0"/>
+        </a:xfrm>
+      </p:grpSpPr>
+      <p:sp>
+        <p:nvSpPr>
+          <p:cNvPr id="2" name="Slide Image Placeholder 1"/>
+          <p:cNvSpPr>
+            <a:spLocks noGrp="1" noRot="1" noChangeAspect="1"/>
+          </p:cNvSpPr>
+          <p:nvPr>
+            <p:ph type="sldImg"/>
+          </p:nvPr>
+        </p:nvSpPr>
+        <p:spPr/>
+      </p:sp>
+      <p:sp>
+        <p:nvSpPr>
+          <p:cNvPr id="3" name="Notes Placeholder 2"/>
+          <p:cNvSpPr>
+            <a:spLocks noGrp="1"/>
+          </p:cNvSpPr>
+          <p:nvPr>
+            <p:ph type="body" idx="1"/>
+          </p:nvPr>
+        </p:nvSpPr>
+        <p:spPr/>
+        <p:txBody>
+          <a:bodyPr/>
+          <a:lstStyle/>
+          <a:p>
+            <a:endParaRPr lang="en-GB" dirty="0"/>
+          </a:p>
+        </p:txBody>
+      </p:sp>
+      <p:sp>
+        <p:nvSpPr>
+          <p:cNvPr id="4" name="Slide Number Placeholder 3"/>
+          <p:cNvSpPr>
+            <a:spLocks noGrp="1"/>
+          </p:cNvSpPr>
+          <p:nvPr>
+            <p:ph type="sldNum" sz="quarter" idx="5"/>
+          </p:nvPr>
+        </p:nvSpPr>
+        <p:spPr/>
+        <p:txBody>
+          <a:bodyPr/>
+          <a:lstStyle/>
+          <a:p>
+            <a:fld id="{E58D555A-2839-854B-83C7-511BB0DDFA80}" type="slidenum">
+              <a:rPr lang="en-GB" smtClean="0"/>
+              <a:t>3</a:t>
+            </a:fld>
+            <a:endParaRPr lang="en-GB"/>
+          </a:p>
+        </p:txBody>
+      </p:sp>
+    </p:spTree>
+    <p:extLst>
+      <p:ext uri="{BB962C8B-B14F-4D97-AF65-F5344CB8AC3E}">
+        <p14:creationId xmlns:p14="http://schemas.microsoft.com/office/powerpoint/2010/main" val="3234496574"/>
+      </p:ext>
+    </p:extLst>
+  </p:cSld>
+  <p:clrMapOvr>
+    <a:masterClrMapping/>
+  </p:clrMapOvr>
+</p:notes>
 </file>
 
 <file path=ppt/slideLayouts/slideLayout1.xml><?xml version="1.0" encoding="utf-8"?>
@@ -4220,7 +4304,7 @@
                 <a:latin typeface="Arial" panose="020B0604020202020204" pitchFamily="34" charset="0"/>
                 <a:cs typeface="Arial" panose="020B0604020202020204" pitchFamily="34" charset="0"/>
               </a:rPr>
-              <a:t>Understanding how eukaryotic cells survive stress and starvation (for bioproduction and biomedicine)</a:t>
+              <a:t>Cellular survival in stress and starvation</a:t>
             </a:r>
           </a:p>
           <a:p>
@@ -4240,7 +4324,7 @@
                 <a:latin typeface="Arial" panose="020B0604020202020204" pitchFamily="34" charset="0"/>
                 <a:cs typeface="Arial" panose="020B0604020202020204" pitchFamily="34" charset="0"/>
               </a:rPr>
-              <a:t>Cell motility (cancer, immunology)</a:t>
+              <a:t>Cell motility</a:t>
             </a:r>
           </a:p>
           <a:p>
@@ -4250,10 +4334,8 @@
                 <a:latin typeface="Arial" panose="020B0604020202020204" pitchFamily="34" charset="0"/>
                 <a:cs typeface="Arial" panose="020B0604020202020204" pitchFamily="34" charset="0"/>
               </a:rPr>
-              <a:t>Structural integrity (diseases of the vasculature)</a:t>
-            </a:r>
-          </a:p>
-          <a:p>
+              <a:t>Structural integrity</a:t>
+            </a:r>
             <a:endParaRPr lang="en-GB" sz="2600" dirty="0"/>
           </a:p>
         </p:txBody>
@@ -4543,7 +4625,7 @@
                 <a:latin typeface="Arial" panose="020B0604020202020204" pitchFamily="34" charset="0"/>
                 <a:cs typeface="Arial" panose="020B0604020202020204" pitchFamily="34" charset="0"/>
               </a:rPr>
-              <a:t>Detects filaments per cell, allowing proper tracking</a:t>
+              <a:t>Properly tracks individual filaments</a:t>
             </a:r>
           </a:p>
           <a:p>
@@ -4561,7 +4643,7 @@
                 <a:latin typeface="Arial" panose="020B0604020202020204" pitchFamily="34" charset="0"/>
                 <a:cs typeface="Arial" panose="020B0604020202020204" pitchFamily="34" charset="0"/>
               </a:rPr>
-              <a:t>Outputs csv data displaying filament growth</a:t>
+              <a:t>Outputs csv data and graphs displaying filament growth</a:t>
             </a:r>
           </a:p>
         </p:txBody>
